--- a/docs/TripRescue-pitch.pptx
+++ b/docs/TripRescue-pitch.pptx
@@ -4784,7 +4784,7 @@
                 <a:ea typeface="Cambria" pitchFamily="34" charset="-122"/>
                 <a:cs typeface="Cambria" pitchFamily="34" charset="-120"/>
               </a:rPr>
-              <a:t>You didn't buy a trip. You bought five things that depend on each other.</a:t>
+              <a:t>You didn't buy a trip. You bought seven things that depend on each other.</a:t>
             </a:r>
             <a:endParaRPr lang="en-US" sz="3400" dirty="0"/>
           </a:p>
@@ -4799,7 +4799,7 @@
         <p:spPr>
           <a:xfrm>
             <a:off x="640080" y="1874520"/>
-            <a:ext cx="1975104" cy="1051560"/>
+            <a:ext cx="1353312" cy="1051560"/>
           </a:xfrm>
           <a:prstGeom prst="roundRect">
             <a:avLst>
@@ -4825,24 +4825,24 @@
         </p:nvSpPr>
         <p:spPr>
           <a:xfrm>
-            <a:off x="786384" y="2048256"/>
-            <a:ext cx="1682496" cy="274320"/>
-          </a:xfrm>
-          <a:prstGeom prst="rect">
-            <a:avLst/>
-          </a:prstGeom>
-          <a:noFill/>
-          <a:ln/>
-        </p:spPr>
-        <p:txBody>
-          <a:bodyPr wrap="square" lIns="0" tIns="0" rIns="0" bIns="0" rtlCol="0" anchor="ctr"/>
-          <a:lstStyle/>
-          <a:p>
-            <a:pPr indent="0" marL="0">
-              <a:buNone/>
-            </a:pPr>
-            <a:r>
-              <a:rPr lang="en-US" sz="1400" b="1" dirty="0">
+            <a:off x="749808" y="2029968"/>
+            <a:ext cx="1133856" cy="274320"/>
+          </a:xfrm>
+          <a:prstGeom prst="rect">
+            <a:avLst/>
+          </a:prstGeom>
+          <a:noFill/>
+          <a:ln/>
+        </p:spPr>
+        <p:txBody>
+          <a:bodyPr wrap="square" lIns="0" tIns="0" rIns="0" bIns="0" rtlCol="0" anchor="ctr"/>
+          <a:lstStyle/>
+          <a:p>
+            <a:pPr indent="0" marL="0">
+              <a:buNone/>
+            </a:pPr>
+            <a:r>
+              <a:rPr lang="en-US" sz="1200" b="1" dirty="0">
                 <a:solidFill>
                   <a:srgbClr val="16202C"/>
                 </a:solidFill>
@@ -4850,87 +4850,87 @@
                 <a:ea typeface="Calibri" pitchFamily="34" charset="-122"/>
                 <a:cs typeface="Calibri" pitchFamily="34" charset="-120"/>
               </a:rPr>
-              <a:t>Flight</a:t>
+              <a:t>Flight out</a:t>
+            </a:r>
+            <a:endParaRPr lang="en-US" sz="1200" dirty="0"/>
+          </a:p>
+        </p:txBody>
+      </p:sp>
+      <p:sp>
+        <p:nvSpPr>
+          <p:cNvPr id="6" name="Text 4"/>
+          <p:cNvSpPr txBox="1"/>
+          <p:nvPr/>
+        </p:nvSpPr>
+        <p:spPr>
+          <a:xfrm>
+            <a:off x="749808" y="2322576"/>
+            <a:ext cx="1133856" cy="457200"/>
+          </a:xfrm>
+          <a:prstGeom prst="rect">
+            <a:avLst/>
+          </a:prstGeom>
+          <a:noFill/>
+          <a:ln/>
+        </p:spPr>
+        <p:txBody>
+          <a:bodyPr wrap="square" lIns="0" tIns="0" rIns="0" bIns="0" rtlCol="0" anchor="ctr"/>
+          <a:lstStyle/>
+          <a:p>
+            <a:pPr indent="0" marL="0">
+              <a:buNone/>
+            </a:pPr>
+            <a:r>
+              <a:rPr lang="en-US" sz="950" dirty="0">
+                <a:solidFill>
+                  <a:srgbClr val="5D6B7C"/>
+                </a:solidFill>
+                <a:latin typeface="Calibri" pitchFamily="34" charset="0"/>
+                <a:ea typeface="Calibri" pitchFamily="34" charset="-122"/>
+                <a:cs typeface="Calibri" pitchFamily="34" charset="-120"/>
+              </a:rPr>
+              <a:t>Demo Air</a:t>
+            </a:r>
+            <a:endParaRPr lang="en-US" sz="950" dirty="0"/>
+          </a:p>
+        </p:txBody>
+      </p:sp>
+      <p:sp>
+        <p:nvSpPr>
+          <p:cNvPr id="7" name="Text 5"/>
+          <p:cNvSpPr txBox="1"/>
+          <p:nvPr/>
+        </p:nvSpPr>
+        <p:spPr>
+          <a:xfrm>
+            <a:off x="1975104" y="2240280"/>
+            <a:ext cx="274320" cy="274320"/>
+          </a:xfrm>
+          <a:prstGeom prst="rect">
+            <a:avLst/>
+          </a:prstGeom>
+          <a:noFill/>
+          <a:ln/>
+        </p:spPr>
+        <p:txBody>
+          <a:bodyPr wrap="square" lIns="0" tIns="0" rIns="0" bIns="0" rtlCol="0" anchor="ctr"/>
+          <a:lstStyle/>
+          <a:p>
+            <a:pPr algn="ctr" indent="0" marL="0">
+              <a:buNone/>
+            </a:pPr>
+            <a:r>
+              <a:rPr lang="en-US" sz="1400" dirty="0">
+                <a:solidFill>
+                  <a:srgbClr val="5D6B7C"/>
+                </a:solidFill>
+                <a:latin typeface="Calibri" pitchFamily="34" charset="0"/>
+                <a:ea typeface="Calibri" pitchFamily="34" charset="-122"/>
+                <a:cs typeface="Calibri" pitchFamily="34" charset="-120"/>
+              </a:rPr>
+              <a:t>→</a:t>
             </a:r>
             <a:endParaRPr lang="en-US" sz="1400" dirty="0"/>
-          </a:p>
-        </p:txBody>
-      </p:sp>
-      <p:sp>
-        <p:nvSpPr>
-          <p:cNvPr id="6" name="Text 4"/>
-          <p:cNvSpPr txBox="1"/>
-          <p:nvPr/>
-        </p:nvSpPr>
-        <p:spPr>
-          <a:xfrm>
-            <a:off x="786384" y="2359152"/>
-            <a:ext cx="1682496" cy="411480"/>
-          </a:xfrm>
-          <a:prstGeom prst="rect">
-            <a:avLst/>
-          </a:prstGeom>
-          <a:noFill/>
-          <a:ln/>
-        </p:spPr>
-        <p:txBody>
-          <a:bodyPr wrap="square" lIns="0" tIns="0" rIns="0" bIns="0" rtlCol="0" anchor="ctr"/>
-          <a:lstStyle/>
-          <a:p>
-            <a:pPr indent="0" marL="0">
-              <a:buNone/>
-            </a:pPr>
-            <a:r>
-              <a:rPr lang="en-US" sz="1100" dirty="0">
-                <a:solidFill>
-                  <a:srgbClr val="5D6B7C"/>
-                </a:solidFill>
-                <a:latin typeface="Calibri" pitchFamily="34" charset="0"/>
-                <a:ea typeface="Calibri" pitchFamily="34" charset="-122"/>
-                <a:cs typeface="Calibri" pitchFamily="34" charset="-120"/>
-              </a:rPr>
-              <a:t>Demo Air</a:t>
-            </a:r>
-            <a:endParaRPr lang="en-US" sz="1100" dirty="0"/>
-          </a:p>
-        </p:txBody>
-      </p:sp>
-      <p:sp>
-        <p:nvSpPr>
-          <p:cNvPr id="7" name="Text 5"/>
-          <p:cNvSpPr txBox="1"/>
-          <p:nvPr/>
-        </p:nvSpPr>
-        <p:spPr>
-          <a:xfrm>
-            <a:off x="2633472" y="2240280"/>
-            <a:ext cx="219456" cy="274320"/>
-          </a:xfrm>
-          <a:prstGeom prst="rect">
-            <a:avLst/>
-          </a:prstGeom>
-          <a:noFill/>
-          <a:ln/>
-        </p:spPr>
-        <p:txBody>
-          <a:bodyPr wrap="square" lIns="0" tIns="0" rIns="0" bIns="0" rtlCol="0" anchor="ctr"/>
-          <a:lstStyle/>
-          <a:p>
-            <a:pPr algn="ctr" indent="0" marL="0">
-              <a:buNone/>
-            </a:pPr>
-            <a:r>
-              <a:rPr lang="en-US" sz="1600" dirty="0">
-                <a:solidFill>
-                  <a:srgbClr val="5D6B7C"/>
-                </a:solidFill>
-                <a:latin typeface="Calibri" pitchFamily="34" charset="0"/>
-                <a:ea typeface="Calibri" pitchFamily="34" charset="-122"/>
-                <a:cs typeface="Calibri" pitchFamily="34" charset="-120"/>
-              </a:rPr>
-              <a:t>→</a:t>
-            </a:r>
-            <a:endParaRPr lang="en-US" sz="1600" dirty="0"/>
           </a:p>
         </p:txBody>
       </p:sp>
@@ -4942,8 +4942,8 @@
         </p:nvSpPr>
         <p:spPr>
           <a:xfrm>
-            <a:off x="2871216" y="1874520"/>
-            <a:ext cx="1975104" cy="1051560"/>
+            <a:off x="2231136" y="1874520"/>
+            <a:ext cx="1353312" cy="1051560"/>
           </a:xfrm>
           <a:prstGeom prst="roundRect">
             <a:avLst>
@@ -4969,24 +4969,24 @@
         </p:nvSpPr>
         <p:spPr>
           <a:xfrm>
-            <a:off x="3017520" y="2048256"/>
-            <a:ext cx="1682496" cy="274320"/>
-          </a:xfrm>
-          <a:prstGeom prst="rect">
-            <a:avLst/>
-          </a:prstGeom>
-          <a:noFill/>
-          <a:ln/>
-        </p:spPr>
-        <p:txBody>
-          <a:bodyPr wrap="square" lIns="0" tIns="0" rIns="0" bIns="0" rtlCol="0" anchor="ctr"/>
-          <a:lstStyle/>
-          <a:p>
-            <a:pPr indent="0" marL="0">
-              <a:buNone/>
-            </a:pPr>
-            <a:r>
-              <a:rPr lang="en-US" sz="1400" b="1" dirty="0">
+            <a:off x="2340864" y="2029968"/>
+            <a:ext cx="1133856" cy="274320"/>
+          </a:xfrm>
+          <a:prstGeom prst="rect">
+            <a:avLst/>
+          </a:prstGeom>
+          <a:noFill/>
+          <a:ln/>
+        </p:spPr>
+        <p:txBody>
+          <a:bodyPr wrap="square" lIns="0" tIns="0" rIns="0" bIns="0" rtlCol="0" anchor="ctr"/>
+          <a:lstStyle/>
+          <a:p>
+            <a:pPr indent="0" marL="0">
+              <a:buNone/>
+            </a:pPr>
+            <a:r>
+              <a:rPr lang="en-US" sz="1200" b="1" dirty="0">
                 <a:solidFill>
                   <a:srgbClr val="16202C"/>
                 </a:solidFill>
@@ -4996,85 +4996,85 @@
               </a:rPr>
               <a:t>Airport bus</a:t>
             </a:r>
+            <a:endParaRPr lang="en-US" sz="1200" dirty="0"/>
+          </a:p>
+        </p:txBody>
+      </p:sp>
+      <p:sp>
+        <p:nvSpPr>
+          <p:cNvPr id="10" name="Text 8"/>
+          <p:cNvSpPr txBox="1"/>
+          <p:nvPr/>
+        </p:nvSpPr>
+        <p:spPr>
+          <a:xfrm>
+            <a:off x="2340864" y="2322576"/>
+            <a:ext cx="1133856" cy="457200"/>
+          </a:xfrm>
+          <a:prstGeom prst="rect">
+            <a:avLst/>
+          </a:prstGeom>
+          <a:noFill/>
+          <a:ln/>
+        </p:spPr>
+        <p:txBody>
+          <a:bodyPr wrap="square" lIns="0" tIns="0" rIns="0" bIns="0" rtlCol="0" anchor="ctr"/>
+          <a:lstStyle/>
+          <a:p>
+            <a:pPr indent="0" marL="0">
+              <a:buNone/>
+            </a:pPr>
+            <a:r>
+              <a:rPr lang="en-US" sz="950" dirty="0">
+                <a:solidFill>
+                  <a:srgbClr val="5D6B7C"/>
+                </a:solidFill>
+                <a:latin typeface="Calibri" pitchFamily="34" charset="0"/>
+                <a:ea typeface="Calibri" pitchFamily="34" charset="-122"/>
+                <a:cs typeface="Calibri" pitchFamily="34" charset="-120"/>
+              </a:rPr>
+              <a:t>Hakone Express</a:t>
+            </a:r>
+            <a:endParaRPr lang="en-US" sz="950" dirty="0"/>
+          </a:p>
+        </p:txBody>
+      </p:sp>
+      <p:sp>
+        <p:nvSpPr>
+          <p:cNvPr id="11" name="Text 9"/>
+          <p:cNvSpPr txBox="1"/>
+          <p:nvPr/>
+        </p:nvSpPr>
+        <p:spPr>
+          <a:xfrm>
+            <a:off x="3566160" y="2240280"/>
+            <a:ext cx="274320" cy="274320"/>
+          </a:xfrm>
+          <a:prstGeom prst="rect">
+            <a:avLst/>
+          </a:prstGeom>
+          <a:noFill/>
+          <a:ln/>
+        </p:spPr>
+        <p:txBody>
+          <a:bodyPr wrap="square" lIns="0" tIns="0" rIns="0" bIns="0" rtlCol="0" anchor="ctr"/>
+          <a:lstStyle/>
+          <a:p>
+            <a:pPr algn="ctr" indent="0" marL="0">
+              <a:buNone/>
+            </a:pPr>
+            <a:r>
+              <a:rPr lang="en-US" sz="1400" dirty="0">
+                <a:solidFill>
+                  <a:srgbClr val="5D6B7C"/>
+                </a:solidFill>
+                <a:latin typeface="Calibri" pitchFamily="34" charset="0"/>
+                <a:ea typeface="Calibri" pitchFamily="34" charset="-122"/>
+                <a:cs typeface="Calibri" pitchFamily="34" charset="-120"/>
+              </a:rPr>
+              <a:t>→</a:t>
+            </a:r>
             <a:endParaRPr lang="en-US" sz="1400" dirty="0"/>
-          </a:p>
-        </p:txBody>
-      </p:sp>
-      <p:sp>
-        <p:nvSpPr>
-          <p:cNvPr id="10" name="Text 8"/>
-          <p:cNvSpPr txBox="1"/>
-          <p:nvPr/>
-        </p:nvSpPr>
-        <p:spPr>
-          <a:xfrm>
-            <a:off x="3017520" y="2359152"/>
-            <a:ext cx="1682496" cy="411480"/>
-          </a:xfrm>
-          <a:prstGeom prst="rect">
-            <a:avLst/>
-          </a:prstGeom>
-          <a:noFill/>
-          <a:ln/>
-        </p:spPr>
-        <p:txBody>
-          <a:bodyPr wrap="square" lIns="0" tIns="0" rIns="0" bIns="0" rtlCol="0" anchor="ctr"/>
-          <a:lstStyle/>
-          <a:p>
-            <a:pPr indent="0" marL="0">
-              <a:buNone/>
-            </a:pPr>
-            <a:r>
-              <a:rPr lang="en-US" sz="1100" dirty="0">
-                <a:solidFill>
-                  <a:srgbClr val="5D6B7C"/>
-                </a:solidFill>
-                <a:latin typeface="Calibri" pitchFamily="34" charset="0"/>
-                <a:ea typeface="Calibri" pitchFamily="34" charset="-122"/>
-                <a:cs typeface="Calibri" pitchFamily="34" charset="-120"/>
-              </a:rPr>
-              <a:t>Hakone Express</a:t>
-            </a:r>
-            <a:endParaRPr lang="en-US" sz="1100" dirty="0"/>
-          </a:p>
-        </p:txBody>
-      </p:sp>
-      <p:sp>
-        <p:nvSpPr>
-          <p:cNvPr id="11" name="Text 9"/>
-          <p:cNvSpPr txBox="1"/>
-          <p:nvPr/>
-        </p:nvSpPr>
-        <p:spPr>
-          <a:xfrm>
-            <a:off x="4864608" y="2240280"/>
-            <a:ext cx="219456" cy="274320"/>
-          </a:xfrm>
-          <a:prstGeom prst="rect">
-            <a:avLst/>
-          </a:prstGeom>
-          <a:noFill/>
-          <a:ln/>
-        </p:spPr>
-        <p:txBody>
-          <a:bodyPr wrap="square" lIns="0" tIns="0" rIns="0" bIns="0" rtlCol="0" anchor="ctr"/>
-          <a:lstStyle/>
-          <a:p>
-            <a:pPr algn="ctr" indent="0" marL="0">
-              <a:buNone/>
-            </a:pPr>
-            <a:r>
-              <a:rPr lang="en-US" sz="1600" dirty="0">
-                <a:solidFill>
-                  <a:srgbClr val="5D6B7C"/>
-                </a:solidFill>
-                <a:latin typeface="Calibri" pitchFamily="34" charset="0"/>
-                <a:ea typeface="Calibri" pitchFamily="34" charset="-122"/>
-                <a:cs typeface="Calibri" pitchFamily="34" charset="-120"/>
-              </a:rPr>
-              <a:t>→</a:t>
-            </a:r>
-            <a:endParaRPr lang="en-US" sz="1600" dirty="0"/>
           </a:p>
         </p:txBody>
       </p:sp>
@@ -5086,8 +5086,8 @@
         </p:nvSpPr>
         <p:spPr>
           <a:xfrm>
-            <a:off x="5102352" y="1874520"/>
-            <a:ext cx="1975104" cy="1051560"/>
+            <a:off x="3822192" y="1874520"/>
+            <a:ext cx="1353312" cy="1051560"/>
           </a:xfrm>
           <a:prstGeom prst="roundRect">
             <a:avLst>
@@ -5113,24 +5113,24 @@
         </p:nvSpPr>
         <p:spPr>
           <a:xfrm>
-            <a:off x="5248656" y="2048256"/>
-            <a:ext cx="1682496" cy="274320"/>
-          </a:xfrm>
-          <a:prstGeom prst="rect">
-            <a:avLst/>
-          </a:prstGeom>
-          <a:noFill/>
-          <a:ln/>
-        </p:spPr>
-        <p:txBody>
-          <a:bodyPr wrap="square" lIns="0" tIns="0" rIns="0" bIns="0" rtlCol="0" anchor="ctr"/>
-          <a:lstStyle/>
-          <a:p>
-            <a:pPr indent="0" marL="0">
-              <a:buNone/>
-            </a:pPr>
-            <a:r>
-              <a:rPr lang="en-US" sz="1400" b="1" dirty="0">
+            <a:off x="3931920" y="2029968"/>
+            <a:ext cx="1133856" cy="274320"/>
+          </a:xfrm>
+          <a:prstGeom prst="rect">
+            <a:avLst/>
+          </a:prstGeom>
+          <a:noFill/>
+          <a:ln/>
+        </p:spPr>
+        <p:txBody>
+          <a:bodyPr wrap="square" lIns="0" tIns="0" rIns="0" bIns="0" rtlCol="0" anchor="ctr"/>
+          <a:lstStyle/>
+          <a:p>
+            <a:pPr indent="0" marL="0">
+              <a:buNone/>
+            </a:pPr>
+            <a:r>
+              <a:rPr lang="en-US" sz="1200" b="1" dirty="0">
                 <a:solidFill>
                   <a:srgbClr val="16202C"/>
                 </a:solidFill>
@@ -5140,85 +5140,85 @@
               </a:rPr>
               <a:t>Hotel</a:t>
             </a:r>
+            <a:endParaRPr lang="en-US" sz="1200" dirty="0"/>
+          </a:p>
+        </p:txBody>
+      </p:sp>
+      <p:sp>
+        <p:nvSpPr>
+          <p:cNvPr id="14" name="Text 12"/>
+          <p:cNvSpPr txBox="1"/>
+          <p:nvPr/>
+        </p:nvSpPr>
+        <p:spPr>
+          <a:xfrm>
+            <a:off x="3931920" y="2322576"/>
+            <a:ext cx="1133856" cy="457200"/>
+          </a:xfrm>
+          <a:prstGeom prst="rect">
+            <a:avLst/>
+          </a:prstGeom>
+          <a:noFill/>
+          <a:ln/>
+        </p:spPr>
+        <p:txBody>
+          <a:bodyPr wrap="square" lIns="0" tIns="0" rIns="0" bIns="0" rtlCol="0" anchor="ctr"/>
+          <a:lstStyle/>
+          <a:p>
+            <a:pPr indent="0" marL="0">
+              <a:buNone/>
+            </a:pPr>
+            <a:r>
+              <a:rPr lang="en-US" sz="950" dirty="0">
+                <a:solidFill>
+                  <a:srgbClr val="5D6B7C"/>
+                </a:solidFill>
+                <a:latin typeface="Calibri" pitchFamily="34" charset="0"/>
+                <a:ea typeface="Calibri" pitchFamily="34" charset="-122"/>
+                <a:cs typeface="Calibri" pitchFamily="34" charset="-120"/>
+              </a:rPr>
+              <a:t>Hakone Springs</a:t>
+            </a:r>
+            <a:endParaRPr lang="en-US" sz="950" dirty="0"/>
+          </a:p>
+        </p:txBody>
+      </p:sp>
+      <p:sp>
+        <p:nvSpPr>
+          <p:cNvPr id="15" name="Text 13"/>
+          <p:cNvSpPr txBox="1"/>
+          <p:nvPr/>
+        </p:nvSpPr>
+        <p:spPr>
+          <a:xfrm>
+            <a:off x="5157216" y="2240280"/>
+            <a:ext cx="274320" cy="274320"/>
+          </a:xfrm>
+          <a:prstGeom prst="rect">
+            <a:avLst/>
+          </a:prstGeom>
+          <a:noFill/>
+          <a:ln/>
+        </p:spPr>
+        <p:txBody>
+          <a:bodyPr wrap="square" lIns="0" tIns="0" rIns="0" bIns="0" rtlCol="0" anchor="ctr"/>
+          <a:lstStyle/>
+          <a:p>
+            <a:pPr algn="ctr" indent="0" marL="0">
+              <a:buNone/>
+            </a:pPr>
+            <a:r>
+              <a:rPr lang="en-US" sz="1400" dirty="0">
+                <a:solidFill>
+                  <a:srgbClr val="5D6B7C"/>
+                </a:solidFill>
+                <a:latin typeface="Calibri" pitchFamily="34" charset="0"/>
+                <a:ea typeface="Calibri" pitchFamily="34" charset="-122"/>
+                <a:cs typeface="Calibri" pitchFamily="34" charset="-120"/>
+              </a:rPr>
+              <a:t>→</a:t>
+            </a:r>
             <a:endParaRPr lang="en-US" sz="1400" dirty="0"/>
-          </a:p>
-        </p:txBody>
-      </p:sp>
-      <p:sp>
-        <p:nvSpPr>
-          <p:cNvPr id="14" name="Text 12"/>
-          <p:cNvSpPr txBox="1"/>
-          <p:nvPr/>
-        </p:nvSpPr>
-        <p:spPr>
-          <a:xfrm>
-            <a:off x="5248656" y="2359152"/>
-            <a:ext cx="1682496" cy="411480"/>
-          </a:xfrm>
-          <a:prstGeom prst="rect">
-            <a:avLst/>
-          </a:prstGeom>
-          <a:noFill/>
-          <a:ln/>
-        </p:spPr>
-        <p:txBody>
-          <a:bodyPr wrap="square" lIns="0" tIns="0" rIns="0" bIns="0" rtlCol="0" anchor="ctr"/>
-          <a:lstStyle/>
-          <a:p>
-            <a:pPr indent="0" marL="0">
-              <a:buNone/>
-            </a:pPr>
-            <a:r>
-              <a:rPr lang="en-US" sz="1100" dirty="0">
-                <a:solidFill>
-                  <a:srgbClr val="5D6B7C"/>
-                </a:solidFill>
-                <a:latin typeface="Calibri" pitchFamily="34" charset="0"/>
-                <a:ea typeface="Calibri" pitchFamily="34" charset="-122"/>
-                <a:cs typeface="Calibri" pitchFamily="34" charset="-120"/>
-              </a:rPr>
-              <a:t>Hakone Springs</a:t>
-            </a:r>
-            <a:endParaRPr lang="en-US" sz="1100" dirty="0"/>
-          </a:p>
-        </p:txBody>
-      </p:sp>
-      <p:sp>
-        <p:nvSpPr>
-          <p:cNvPr id="15" name="Text 13"/>
-          <p:cNvSpPr txBox="1"/>
-          <p:nvPr/>
-        </p:nvSpPr>
-        <p:spPr>
-          <a:xfrm>
-            <a:off x="7095744" y="2240280"/>
-            <a:ext cx="219456" cy="274320"/>
-          </a:xfrm>
-          <a:prstGeom prst="rect">
-            <a:avLst/>
-          </a:prstGeom>
-          <a:noFill/>
-          <a:ln/>
-        </p:spPr>
-        <p:txBody>
-          <a:bodyPr wrap="square" lIns="0" tIns="0" rIns="0" bIns="0" rtlCol="0" anchor="ctr"/>
-          <a:lstStyle/>
-          <a:p>
-            <a:pPr algn="ctr" indent="0" marL="0">
-              <a:buNone/>
-            </a:pPr>
-            <a:r>
-              <a:rPr lang="en-US" sz="1600" dirty="0">
-                <a:solidFill>
-                  <a:srgbClr val="5D6B7C"/>
-                </a:solidFill>
-                <a:latin typeface="Calibri" pitchFamily="34" charset="0"/>
-                <a:ea typeface="Calibri" pitchFamily="34" charset="-122"/>
-                <a:cs typeface="Calibri" pitchFamily="34" charset="-120"/>
-              </a:rPr>
-              <a:t>→</a:t>
-            </a:r>
-            <a:endParaRPr lang="en-US" sz="1600" dirty="0"/>
           </a:p>
         </p:txBody>
       </p:sp>
@@ -5230,8 +5230,8 @@
         </p:nvSpPr>
         <p:spPr>
           <a:xfrm>
-            <a:off x="7333488" y="1874520"/>
-            <a:ext cx="1975104" cy="1051560"/>
+            <a:off x="5413248" y="1874520"/>
+            <a:ext cx="1353312" cy="1051560"/>
           </a:xfrm>
           <a:prstGeom prst="roundRect">
             <a:avLst>
@@ -5257,24 +5257,24 @@
         </p:nvSpPr>
         <p:spPr>
           <a:xfrm>
-            <a:off x="7479792" y="2048256"/>
-            <a:ext cx="1682496" cy="274320"/>
-          </a:xfrm>
-          <a:prstGeom prst="rect">
-            <a:avLst/>
-          </a:prstGeom>
-          <a:noFill/>
-          <a:ln/>
-        </p:spPr>
-        <p:txBody>
-          <a:bodyPr wrap="square" lIns="0" tIns="0" rIns="0" bIns="0" rtlCol="0" anchor="ctr"/>
-          <a:lstStyle/>
-          <a:p>
-            <a:pPr indent="0" marL="0">
-              <a:buNone/>
-            </a:pPr>
-            <a:r>
-              <a:rPr lang="en-US" sz="1400" b="1" dirty="0">
+            <a:off x="5522976" y="2029968"/>
+            <a:ext cx="1133856" cy="274320"/>
+          </a:xfrm>
+          <a:prstGeom prst="rect">
+            <a:avLst/>
+          </a:prstGeom>
+          <a:noFill/>
+          <a:ln/>
+        </p:spPr>
+        <p:txBody>
+          <a:bodyPr wrap="square" lIns="0" tIns="0" rIns="0" bIns="0" rtlCol="0" anchor="ctr"/>
+          <a:lstStyle/>
+          <a:p>
+            <a:pPr indent="0" marL="0">
+              <a:buNone/>
+            </a:pPr>
+            <a:r>
+              <a:rPr lang="en-US" sz="1200" b="1" dirty="0">
                 <a:solidFill>
                   <a:srgbClr val="16202C"/>
                 </a:solidFill>
@@ -5284,85 +5284,85 @@
               </a:rPr>
               <a:t>Rental car</a:t>
             </a:r>
+            <a:endParaRPr lang="en-US" sz="1200" dirty="0"/>
+          </a:p>
+        </p:txBody>
+      </p:sp>
+      <p:sp>
+        <p:nvSpPr>
+          <p:cNvPr id="18" name="Text 16"/>
+          <p:cNvSpPr txBox="1"/>
+          <p:nvPr/>
+        </p:nvSpPr>
+        <p:spPr>
+          <a:xfrm>
+            <a:off x="5522976" y="2322576"/>
+            <a:ext cx="1133856" cy="457200"/>
+          </a:xfrm>
+          <a:prstGeom prst="rect">
+            <a:avLst/>
+          </a:prstGeom>
+          <a:noFill/>
+          <a:ln/>
+        </p:spPr>
+        <p:txBody>
+          <a:bodyPr wrap="square" lIns="0" tIns="0" rIns="0" bIns="0" rtlCol="0" anchor="ctr"/>
+          <a:lstStyle/>
+          <a:p>
+            <a:pPr indent="0" marL="0">
+              <a:buNone/>
+            </a:pPr>
+            <a:r>
+              <a:rPr lang="en-US" sz="950" dirty="0">
+                <a:solidFill>
+                  <a:srgbClr val="5D6B7C"/>
+                </a:solidFill>
+                <a:latin typeface="Calibri" pitchFamily="34" charset="0"/>
+                <a:ea typeface="Calibri" pitchFamily="34" charset="-122"/>
+                <a:cs typeface="Calibri" pitchFamily="34" charset="-120"/>
+              </a:rPr>
+              <a:t>Hakone Drive</a:t>
+            </a:r>
+            <a:endParaRPr lang="en-US" sz="950" dirty="0"/>
+          </a:p>
+        </p:txBody>
+      </p:sp>
+      <p:sp>
+        <p:nvSpPr>
+          <p:cNvPr id="19" name="Text 17"/>
+          <p:cNvSpPr txBox="1"/>
+          <p:nvPr/>
+        </p:nvSpPr>
+        <p:spPr>
+          <a:xfrm>
+            <a:off x="6748272" y="2240280"/>
+            <a:ext cx="274320" cy="274320"/>
+          </a:xfrm>
+          <a:prstGeom prst="rect">
+            <a:avLst/>
+          </a:prstGeom>
+          <a:noFill/>
+          <a:ln/>
+        </p:spPr>
+        <p:txBody>
+          <a:bodyPr wrap="square" lIns="0" tIns="0" rIns="0" bIns="0" rtlCol="0" anchor="ctr"/>
+          <a:lstStyle/>
+          <a:p>
+            <a:pPr algn="ctr" indent="0" marL="0">
+              <a:buNone/>
+            </a:pPr>
+            <a:r>
+              <a:rPr lang="en-US" sz="1400" dirty="0">
+                <a:solidFill>
+                  <a:srgbClr val="5D6B7C"/>
+                </a:solidFill>
+                <a:latin typeface="Calibri" pitchFamily="34" charset="0"/>
+                <a:ea typeface="Calibri" pitchFamily="34" charset="-122"/>
+                <a:cs typeface="Calibri" pitchFamily="34" charset="-120"/>
+              </a:rPr>
+              <a:t>→</a:t>
+            </a:r>
             <a:endParaRPr lang="en-US" sz="1400" dirty="0"/>
-          </a:p>
-        </p:txBody>
-      </p:sp>
-      <p:sp>
-        <p:nvSpPr>
-          <p:cNvPr id="18" name="Text 16"/>
-          <p:cNvSpPr txBox="1"/>
-          <p:nvPr/>
-        </p:nvSpPr>
-        <p:spPr>
-          <a:xfrm>
-            <a:off x="7479792" y="2359152"/>
-            <a:ext cx="1682496" cy="411480"/>
-          </a:xfrm>
-          <a:prstGeom prst="rect">
-            <a:avLst/>
-          </a:prstGeom>
-          <a:noFill/>
-          <a:ln/>
-        </p:spPr>
-        <p:txBody>
-          <a:bodyPr wrap="square" lIns="0" tIns="0" rIns="0" bIns="0" rtlCol="0" anchor="ctr"/>
-          <a:lstStyle/>
-          <a:p>
-            <a:pPr indent="0" marL="0">
-              <a:buNone/>
-            </a:pPr>
-            <a:r>
-              <a:rPr lang="en-US" sz="1100" dirty="0">
-                <a:solidFill>
-                  <a:srgbClr val="5D6B7C"/>
-                </a:solidFill>
-                <a:latin typeface="Calibri" pitchFamily="34" charset="0"/>
-                <a:ea typeface="Calibri" pitchFamily="34" charset="-122"/>
-                <a:cs typeface="Calibri" pitchFamily="34" charset="-120"/>
-              </a:rPr>
-              <a:t>Hakone Drive</a:t>
-            </a:r>
-            <a:endParaRPr lang="en-US" sz="1100" dirty="0"/>
-          </a:p>
-        </p:txBody>
-      </p:sp>
-      <p:sp>
-        <p:nvSpPr>
-          <p:cNvPr id="19" name="Text 17"/>
-          <p:cNvSpPr txBox="1"/>
-          <p:nvPr/>
-        </p:nvSpPr>
-        <p:spPr>
-          <a:xfrm>
-            <a:off x="9326880" y="2240280"/>
-            <a:ext cx="219456" cy="274320"/>
-          </a:xfrm>
-          <a:prstGeom prst="rect">
-            <a:avLst/>
-          </a:prstGeom>
-          <a:noFill/>
-          <a:ln/>
-        </p:spPr>
-        <p:txBody>
-          <a:bodyPr wrap="square" lIns="0" tIns="0" rIns="0" bIns="0" rtlCol="0" anchor="ctr"/>
-          <a:lstStyle/>
-          <a:p>
-            <a:pPr algn="ctr" indent="0" marL="0">
-              <a:buNone/>
-            </a:pPr>
-            <a:r>
-              <a:rPr lang="en-US" sz="1600" dirty="0">
-                <a:solidFill>
-                  <a:srgbClr val="5D6B7C"/>
-                </a:solidFill>
-                <a:latin typeface="Calibri" pitchFamily="34" charset="0"/>
-                <a:ea typeface="Calibri" pitchFamily="34" charset="-122"/>
-                <a:cs typeface="Calibri" pitchFamily="34" charset="-120"/>
-              </a:rPr>
-              <a:t>→</a:t>
-            </a:r>
-            <a:endParaRPr lang="en-US" sz="1600" dirty="0"/>
           </a:p>
         </p:txBody>
       </p:sp>
@@ -5374,8 +5374,8 @@
         </p:nvSpPr>
         <p:spPr>
           <a:xfrm>
-            <a:off x="9564624" y="1874520"/>
-            <a:ext cx="1975104" cy="1051560"/>
+            <a:off x="7004304" y="1874520"/>
+            <a:ext cx="1353312" cy="1051560"/>
           </a:xfrm>
           <a:prstGeom prst="roundRect">
             <a:avLst>
@@ -5401,24 +5401,24 @@
         </p:nvSpPr>
         <p:spPr>
           <a:xfrm>
-            <a:off x="9710928" y="2048256"/>
-            <a:ext cx="1682496" cy="274320"/>
-          </a:xfrm>
-          <a:prstGeom prst="rect">
-            <a:avLst/>
-          </a:prstGeom>
-          <a:noFill/>
-          <a:ln/>
-        </p:spPr>
-        <p:txBody>
-          <a:bodyPr wrap="square" lIns="0" tIns="0" rIns="0" bIns="0" rtlCol="0" anchor="ctr"/>
-          <a:lstStyle/>
-          <a:p>
-            <a:pPr indent="0" marL="0">
-              <a:buNone/>
-            </a:pPr>
-            <a:r>
-              <a:rPr lang="en-US" sz="1400" b="1" dirty="0">
+            <a:off x="7114032" y="2029968"/>
+            <a:ext cx="1133856" cy="274320"/>
+          </a:xfrm>
+          <a:prstGeom prst="rect">
+            <a:avLst/>
+          </a:prstGeom>
+          <a:noFill/>
+          <a:ln/>
+        </p:spPr>
+        <p:txBody>
+          <a:bodyPr wrap="square" lIns="0" tIns="0" rIns="0" bIns="0" rtlCol="0" anchor="ctr"/>
+          <a:lstStyle/>
+          <a:p>
+            <a:pPr indent="0" marL="0">
+              <a:buNone/>
+            </a:pPr>
+            <a:r>
+              <a:rPr lang="en-US" sz="1200" b="1" dirty="0">
                 <a:solidFill>
                   <a:srgbClr val="16202C"/>
                 </a:solidFill>
@@ -5428,7 +5428,7 @@
               </a:rPr>
               <a:t>Activity</a:t>
             </a:r>
-            <a:endParaRPr lang="en-US" sz="1400" dirty="0"/>
+            <a:endParaRPr lang="en-US" sz="1200" dirty="0"/>
           </a:p>
         </p:txBody>
       </p:sp>
@@ -5440,24 +5440,24 @@
         </p:nvSpPr>
         <p:spPr>
           <a:xfrm>
-            <a:off x="9710928" y="2359152"/>
-            <a:ext cx="1682496" cy="411480"/>
-          </a:xfrm>
-          <a:prstGeom prst="rect">
-            <a:avLst/>
-          </a:prstGeom>
-          <a:noFill/>
-          <a:ln/>
-        </p:spPr>
-        <p:txBody>
-          <a:bodyPr wrap="square" lIns="0" tIns="0" rIns="0" bIns="0" rtlCol="0" anchor="ctr"/>
-          <a:lstStyle/>
-          <a:p>
-            <a:pPr indent="0" marL="0">
-              <a:buNone/>
-            </a:pPr>
-            <a:r>
-              <a:rPr lang="en-US" sz="1100" dirty="0">
+            <a:off x="7114032" y="2322576"/>
+            <a:ext cx="1133856" cy="457200"/>
+          </a:xfrm>
+          <a:prstGeom prst="rect">
+            <a:avLst/>
+          </a:prstGeom>
+          <a:noFill/>
+          <a:ln/>
+        </p:spPr>
+        <p:txBody>
+          <a:bodyPr wrap="square" lIns="0" tIns="0" rIns="0" bIns="0" rtlCol="0" anchor="ctr"/>
+          <a:lstStyle/>
+          <a:p>
+            <a:pPr indent="0" marL="0">
+              <a:buNone/>
+            </a:pPr>
+            <a:r>
+              <a:rPr lang="en-US" sz="950" dirty="0">
                 <a:solidFill>
                   <a:srgbClr val="5D6B7C"/>
                 </a:solidFill>
@@ -5467,7 +5467,7 @@
               </a:rPr>
               <a:t>Fuji Day Tours</a:t>
             </a:r>
-            <a:endParaRPr lang="en-US" sz="1100" dirty="0"/>
+            <a:endParaRPr lang="en-US" sz="950" dirty="0"/>
           </a:p>
         </p:txBody>
       </p:sp>
@@ -5479,24 +5479,24 @@
         </p:nvSpPr>
         <p:spPr>
           <a:xfrm>
-            <a:off x="640080" y="3127248"/>
-            <a:ext cx="10881360" cy="320040"/>
-          </a:xfrm>
-          <a:prstGeom prst="rect">
-            <a:avLst/>
-          </a:prstGeom>
-          <a:noFill/>
-          <a:ln/>
-        </p:spPr>
-        <p:txBody>
-          <a:bodyPr wrap="square" lIns="0" tIns="0" rIns="0" bIns="0" rtlCol="0" anchor="ctr"/>
-          <a:lstStyle/>
-          <a:p>
-            <a:pPr indent="0" marL="0">
-              <a:buNone/>
-            </a:pPr>
-            <a:r>
-              <a:rPr lang="en-US" sz="1400" i="1" dirty="0">
+            <a:off x="8339328" y="2240280"/>
+            <a:ext cx="274320" cy="274320"/>
+          </a:xfrm>
+          <a:prstGeom prst="rect">
+            <a:avLst/>
+          </a:prstGeom>
+          <a:noFill/>
+          <a:ln/>
+        </p:spPr>
+        <p:txBody>
+          <a:bodyPr wrap="square" lIns="0" tIns="0" rIns="0" bIns="0" rtlCol="0" anchor="ctr"/>
+          <a:lstStyle/>
+          <a:p>
+            <a:pPr algn="ctr" indent="0" marL="0">
+              <a:buNone/>
+            </a:pPr>
+            <a:r>
+              <a:rPr lang="en-US" sz="1400" dirty="0">
                 <a:solidFill>
                   <a:srgbClr val="5D6B7C"/>
                 </a:solidFill>
@@ -5504,7 +5504,7 @@
                 <a:ea typeface="Calibri" pitchFamily="34" charset="-122"/>
                 <a:cs typeface="Calibri" pitchFamily="34" charset="-120"/>
               </a:rPr>
-              <a:t>Bought separately. Operationally inseparable.</a:t>
+              <a:t>→</a:t>
             </a:r>
             <a:endParaRPr lang="en-US" sz="1400" dirty="0"/>
           </a:p>
@@ -5518,12 +5518,12 @@
         </p:nvSpPr>
         <p:spPr>
           <a:xfrm>
-            <a:off x="640080" y="3749040"/>
-            <a:ext cx="5257800" cy="2194560"/>
+            <a:off x="8595360" y="1874520"/>
+            <a:ext cx="1353312" cy="1051560"/>
           </a:xfrm>
           <a:prstGeom prst="roundRect">
             <a:avLst>
-              <a:gd name="adj" fmla="val 2500"/>
+              <a:gd name="adj" fmla="val 5217"/>
             </a:avLst>
           </a:prstGeom>
           <a:solidFill>
@@ -5545,6 +5545,294 @@
         </p:nvSpPr>
         <p:spPr>
           <a:xfrm>
+            <a:off x="8705088" y="2029968"/>
+            <a:ext cx="1133856" cy="274320"/>
+          </a:xfrm>
+          <a:prstGeom prst="rect">
+            <a:avLst/>
+          </a:prstGeom>
+          <a:noFill/>
+          <a:ln/>
+        </p:spPr>
+        <p:txBody>
+          <a:bodyPr wrap="square" lIns="0" tIns="0" rIns="0" bIns="0" rtlCol="0" anchor="ctr"/>
+          <a:lstStyle/>
+          <a:p>
+            <a:pPr indent="0" marL="0">
+              <a:buNone/>
+            </a:pPr>
+            <a:r>
+              <a:rPr lang="en-US" sz="1200" b="1" dirty="0">
+                <a:solidFill>
+                  <a:srgbClr val="16202C"/>
+                </a:solidFill>
+                <a:latin typeface="Calibri" pitchFamily="34" charset="0"/>
+                <a:ea typeface="Calibri" pitchFamily="34" charset="-122"/>
+                <a:cs typeface="Calibri" pitchFamily="34" charset="-120"/>
+              </a:rPr>
+              <a:t>Transfer back</a:t>
+            </a:r>
+            <a:endParaRPr lang="en-US" sz="1200" dirty="0"/>
+          </a:p>
+        </p:txBody>
+      </p:sp>
+      <p:sp>
+        <p:nvSpPr>
+          <p:cNvPr id="26" name="Text 24"/>
+          <p:cNvSpPr txBox="1"/>
+          <p:nvPr/>
+        </p:nvSpPr>
+        <p:spPr>
+          <a:xfrm>
+            <a:off x="8705088" y="2322576"/>
+            <a:ext cx="1133856" cy="457200"/>
+          </a:xfrm>
+          <a:prstGeom prst="rect">
+            <a:avLst/>
+          </a:prstGeom>
+          <a:noFill/>
+          <a:ln/>
+        </p:spPr>
+        <p:txBody>
+          <a:bodyPr wrap="square" lIns="0" tIns="0" rIns="0" bIns="0" rtlCol="0" anchor="ctr"/>
+          <a:lstStyle/>
+          <a:p>
+            <a:pPr indent="0" marL="0">
+              <a:buNone/>
+            </a:pPr>
+            <a:r>
+              <a:rPr lang="en-US" sz="950" dirty="0">
+                <a:solidFill>
+                  <a:srgbClr val="5D6B7C"/>
+                </a:solidFill>
+                <a:latin typeface="Calibri" pitchFamily="34" charset="0"/>
+                <a:ea typeface="Calibri" pitchFamily="34" charset="-122"/>
+                <a:cs typeface="Calibri" pitchFamily="34" charset="-120"/>
+              </a:rPr>
+              <a:t>Hakone Express</a:t>
+            </a:r>
+            <a:endParaRPr lang="en-US" sz="950" dirty="0"/>
+          </a:p>
+        </p:txBody>
+      </p:sp>
+      <p:sp>
+        <p:nvSpPr>
+          <p:cNvPr id="27" name="Text 25"/>
+          <p:cNvSpPr txBox="1"/>
+          <p:nvPr/>
+        </p:nvSpPr>
+        <p:spPr>
+          <a:xfrm>
+            <a:off x="9930384" y="2240280"/>
+            <a:ext cx="274320" cy="274320"/>
+          </a:xfrm>
+          <a:prstGeom prst="rect">
+            <a:avLst/>
+          </a:prstGeom>
+          <a:noFill/>
+          <a:ln/>
+        </p:spPr>
+        <p:txBody>
+          <a:bodyPr wrap="square" lIns="0" tIns="0" rIns="0" bIns="0" rtlCol="0" anchor="ctr"/>
+          <a:lstStyle/>
+          <a:p>
+            <a:pPr algn="ctr" indent="0" marL="0">
+              <a:buNone/>
+            </a:pPr>
+            <a:r>
+              <a:rPr lang="en-US" sz="1400" dirty="0">
+                <a:solidFill>
+                  <a:srgbClr val="5D6B7C"/>
+                </a:solidFill>
+                <a:latin typeface="Calibri" pitchFamily="34" charset="0"/>
+                <a:ea typeface="Calibri" pitchFamily="34" charset="-122"/>
+                <a:cs typeface="Calibri" pitchFamily="34" charset="-120"/>
+              </a:rPr>
+              <a:t>→</a:t>
+            </a:r>
+            <a:endParaRPr lang="en-US" sz="1400" dirty="0"/>
+          </a:p>
+        </p:txBody>
+      </p:sp>
+      <p:sp>
+        <p:nvSpPr>
+          <p:cNvPr id="28" name="Shape 26"/>
+          <p:cNvSpPr/>
+          <p:nvPr/>
+        </p:nvSpPr>
+        <p:spPr>
+          <a:xfrm>
+            <a:off x="10186416" y="1874520"/>
+            <a:ext cx="1353312" cy="1051560"/>
+          </a:xfrm>
+          <a:prstGeom prst="roundRect">
+            <a:avLst>
+              <a:gd name="adj" fmla="val 5217"/>
+            </a:avLst>
+          </a:prstGeom>
+          <a:solidFill>
+            <a:srgbClr val="F2F5F8"/>
+          </a:solidFill>
+          <a:ln w="12700">
+            <a:solidFill>
+              <a:srgbClr val="DCE3EA"/>
+            </a:solidFill>
+            <a:prstDash val="solid"/>
+          </a:ln>
+        </p:spPr>
+      </p:sp>
+      <p:sp>
+        <p:nvSpPr>
+          <p:cNvPr id="29" name="Text 27"/>
+          <p:cNvSpPr txBox="1"/>
+          <p:nvPr/>
+        </p:nvSpPr>
+        <p:spPr>
+          <a:xfrm>
+            <a:off x="10296144" y="2029968"/>
+            <a:ext cx="1133856" cy="274320"/>
+          </a:xfrm>
+          <a:prstGeom prst="rect">
+            <a:avLst/>
+          </a:prstGeom>
+          <a:noFill/>
+          <a:ln/>
+        </p:spPr>
+        <p:txBody>
+          <a:bodyPr wrap="square" lIns="0" tIns="0" rIns="0" bIns="0" rtlCol="0" anchor="ctr"/>
+          <a:lstStyle/>
+          <a:p>
+            <a:pPr indent="0" marL="0">
+              <a:buNone/>
+            </a:pPr>
+            <a:r>
+              <a:rPr lang="en-US" sz="1200" b="1" dirty="0">
+                <a:solidFill>
+                  <a:srgbClr val="16202C"/>
+                </a:solidFill>
+                <a:latin typeface="Calibri" pitchFamily="34" charset="0"/>
+                <a:ea typeface="Calibri" pitchFamily="34" charset="-122"/>
+                <a:cs typeface="Calibri" pitchFamily="34" charset="-120"/>
+              </a:rPr>
+              <a:t>Flight home</a:t>
+            </a:r>
+            <a:endParaRPr lang="en-US" sz="1200" dirty="0"/>
+          </a:p>
+        </p:txBody>
+      </p:sp>
+      <p:sp>
+        <p:nvSpPr>
+          <p:cNvPr id="30" name="Text 28"/>
+          <p:cNvSpPr txBox="1"/>
+          <p:nvPr/>
+        </p:nvSpPr>
+        <p:spPr>
+          <a:xfrm>
+            <a:off x="10296144" y="2322576"/>
+            <a:ext cx="1133856" cy="457200"/>
+          </a:xfrm>
+          <a:prstGeom prst="rect">
+            <a:avLst/>
+          </a:prstGeom>
+          <a:noFill/>
+          <a:ln/>
+        </p:spPr>
+        <p:txBody>
+          <a:bodyPr wrap="square" lIns="0" tIns="0" rIns="0" bIns="0" rtlCol="0" anchor="ctr"/>
+          <a:lstStyle/>
+          <a:p>
+            <a:pPr indent="0" marL="0">
+              <a:buNone/>
+            </a:pPr>
+            <a:r>
+              <a:rPr lang="en-US" sz="950" dirty="0">
+                <a:solidFill>
+                  <a:srgbClr val="5D6B7C"/>
+                </a:solidFill>
+                <a:latin typeface="Calibri" pitchFamily="34" charset="0"/>
+                <a:ea typeface="Calibri" pitchFamily="34" charset="-122"/>
+                <a:cs typeface="Calibri" pitchFamily="34" charset="-120"/>
+              </a:rPr>
+              <a:t>Demo Air</a:t>
+            </a:r>
+            <a:endParaRPr lang="en-US" sz="950" dirty="0"/>
+          </a:p>
+        </p:txBody>
+      </p:sp>
+      <p:sp>
+        <p:nvSpPr>
+          <p:cNvPr id="31" name="Text 29"/>
+          <p:cNvSpPr txBox="1"/>
+          <p:nvPr/>
+        </p:nvSpPr>
+        <p:spPr>
+          <a:xfrm>
+            <a:off x="640080" y="3127248"/>
+            <a:ext cx="10881360" cy="320040"/>
+          </a:xfrm>
+          <a:prstGeom prst="rect">
+            <a:avLst/>
+          </a:prstGeom>
+          <a:noFill/>
+          <a:ln/>
+        </p:spPr>
+        <p:txBody>
+          <a:bodyPr wrap="square" lIns="0" tIns="0" rIns="0" bIns="0" rtlCol="0" anchor="ctr"/>
+          <a:lstStyle/>
+          <a:p>
+            <a:pPr indent="0" marL="0">
+              <a:buNone/>
+            </a:pPr>
+            <a:r>
+              <a:rPr lang="en-US" sz="1400" i="1" dirty="0">
+                <a:solidFill>
+                  <a:srgbClr val="5D6B7C"/>
+                </a:solidFill>
+                <a:latin typeface="Calibri" pitchFamily="34" charset="0"/>
+                <a:ea typeface="Calibri" pitchFamily="34" charset="-122"/>
+                <a:cs typeface="Calibri" pitchFamily="34" charset="-120"/>
+              </a:rPr>
+              <a:t>Bought separately. Operationally inseparable.</a:t>
+            </a:r>
+            <a:endParaRPr lang="en-US" sz="1400" dirty="0"/>
+          </a:p>
+        </p:txBody>
+      </p:sp>
+      <p:sp>
+        <p:nvSpPr>
+          <p:cNvPr id="32" name="Shape 30"/>
+          <p:cNvSpPr/>
+          <p:nvPr/>
+        </p:nvSpPr>
+        <p:spPr>
+          <a:xfrm>
+            <a:off x="640080" y="3749040"/>
+            <a:ext cx="5257800" cy="2194560"/>
+          </a:xfrm>
+          <a:prstGeom prst="roundRect">
+            <a:avLst>
+              <a:gd name="adj" fmla="val 2500"/>
+            </a:avLst>
+          </a:prstGeom>
+          <a:solidFill>
+            <a:srgbClr val="F2F5F8"/>
+          </a:solidFill>
+          <a:ln w="12700">
+            <a:solidFill>
+              <a:srgbClr val="DCE3EA"/>
+            </a:solidFill>
+            <a:prstDash val="solid"/>
+          </a:ln>
+        </p:spPr>
+      </p:sp>
+      <p:sp>
+        <p:nvSpPr>
+          <p:cNvPr id="33" name="Text 31"/>
+          <p:cNvSpPr txBox="1"/>
+          <p:nvPr/>
+        </p:nvSpPr>
+        <p:spPr>
+          <a:xfrm>
             <a:off x="914400" y="3950208"/>
             <a:ext cx="4709160" cy="320040"/>
           </a:xfrm>
@@ -5578,7 +5866,7 @@
       </p:sp>
       <p:sp>
         <p:nvSpPr>
-          <p:cNvPr id="26" name="Text 24"/>
+          <p:cNvPr id="34" name="Text 32"/>
           <p:cNvSpPr txBox="1"/>
           <p:nvPr/>
         </p:nvSpPr>
@@ -5663,7 +5951,7 @@
       </p:sp>
       <p:sp>
         <p:nvSpPr>
-          <p:cNvPr id="27" name="Shape 25"/>
+          <p:cNvPr id="35" name="Shape 33"/>
           <p:cNvSpPr/>
           <p:nvPr/>
         </p:nvSpPr>
@@ -5690,7 +5978,7 @@
       </p:sp>
       <p:sp>
         <p:nvSpPr>
-          <p:cNvPr id="28" name="Text 26"/>
+          <p:cNvPr id="36" name="Text 34"/>
           <p:cNvSpPr txBox="1"/>
           <p:nvPr/>
         </p:nvSpPr>
@@ -5729,7 +6017,7 @@
       </p:sp>
       <p:sp>
         <p:nvSpPr>
-          <p:cNvPr id="29" name="Text 27"/>
+          <p:cNvPr id="37" name="Text 35"/>
           <p:cNvSpPr txBox="1"/>
           <p:nvPr/>
         </p:nvSpPr>
@@ -5870,7 +6158,7 @@
                 <a:ea typeface="Cambria" pitchFamily="34" charset="-122"/>
                 <a:cs typeface="Cambria" pitchFamily="34" charset="-120"/>
               </a:rPr>
-              <a:t>One cancellation. Five consequences.</a:t>
+              <a:t>One cancellation. And it knows where to stop.</a:t>
             </a:r>
             <a:endParaRPr lang="en-US" sz="3400" dirty="0"/>
           </a:p>
@@ -5884,8 +6172,8 @@
         </p:nvSpPr>
         <p:spPr>
           <a:xfrm>
-            <a:off x="740664" y="1929384"/>
-            <a:ext cx="0" cy="2633472"/>
+            <a:off x="740664" y="1883664"/>
+            <a:ext cx="0" cy="3291840"/>
           </a:xfrm>
           <a:prstGeom prst="line">
             <a:avLst/>
@@ -5907,7 +6195,7 @@
         </p:nvSpPr>
         <p:spPr>
           <a:xfrm>
-            <a:off x="658368" y="1929384"/>
+            <a:off x="658368" y="1856232"/>
             <a:ext cx="164592" cy="164592"/>
           </a:xfrm>
           <a:prstGeom prst="ellipse">
@@ -5927,7 +6215,7 @@
         </p:nvSpPr>
         <p:spPr>
           <a:xfrm>
-            <a:off x="1024128" y="1801368"/>
+            <a:off x="1024128" y="1737360"/>
             <a:ext cx="3840480" cy="274320"/>
           </a:xfrm>
           <a:prstGeom prst="rect">
@@ -5944,7 +6232,7 @@
               <a:buNone/>
             </a:pPr>
             <a:r>
-              <a:rPr lang="en-US" sz="1500" b="1" dirty="0">
+              <a:rPr lang="en-US" sz="1400" b="1" dirty="0">
                 <a:solidFill>
                   <a:srgbClr val="16202C"/>
                 </a:solidFill>
@@ -5954,7 +6242,7 @@
               </a:rPr>
               <a:t>Singapore → Narita flight</a:t>
             </a:r>
-            <a:endParaRPr lang="en-US" sz="1500" dirty="0"/>
+            <a:endParaRPr lang="en-US" sz="1400" dirty="0"/>
           </a:p>
         </p:txBody>
       </p:sp>
@@ -5966,7 +6254,7 @@
         </p:nvSpPr>
         <p:spPr>
           <a:xfrm>
-            <a:off x="4937760" y="1828800"/>
+            <a:off x="4937760" y="1764792"/>
             <a:ext cx="914400" cy="237744"/>
           </a:xfrm>
           <a:prstGeom prst="rect">
@@ -6005,7 +6293,7 @@
         </p:nvSpPr>
         <p:spPr>
           <a:xfrm>
-            <a:off x="5989320" y="1801368"/>
+            <a:off x="5989320" y="1737360"/>
             <a:ext cx="4114800" cy="292608"/>
           </a:xfrm>
           <a:prstGeom prst="rect">
@@ -6022,7 +6310,7 @@
               <a:buNone/>
             </a:pPr>
             <a:r>
-              <a:rPr lang="en-US" sz="1300" dirty="0">
+              <a:rPr lang="en-US" sz="1250" dirty="0">
                 <a:solidFill>
                   <a:srgbClr val="5D6B7C"/>
                 </a:solidFill>
@@ -6032,7 +6320,7 @@
               </a:rPr>
               <a:t>Service cancelled</a:t>
             </a:r>
-            <a:endParaRPr lang="en-US" sz="1300" dirty="0"/>
+            <a:endParaRPr lang="en-US" sz="1250" dirty="0"/>
           </a:p>
         </p:txBody>
       </p:sp>
@@ -6044,7 +6332,7 @@
         </p:nvSpPr>
         <p:spPr>
           <a:xfrm>
-            <a:off x="658368" y="2587752"/>
+            <a:off x="658368" y="2404872"/>
             <a:ext cx="164592" cy="164592"/>
           </a:xfrm>
           <a:prstGeom prst="ellipse">
@@ -6064,7 +6352,7 @@
         </p:nvSpPr>
         <p:spPr>
           <a:xfrm>
-            <a:off x="1024128" y="2459736"/>
+            <a:off x="1024128" y="2286000"/>
             <a:ext cx="3840480" cy="274320"/>
           </a:xfrm>
           <a:prstGeom prst="rect">
@@ -6081,7 +6369,7 @@
               <a:buNone/>
             </a:pPr>
             <a:r>
-              <a:rPr lang="en-US" sz="1500" b="1" dirty="0">
+              <a:rPr lang="en-US" sz="1400" b="1" dirty="0">
                 <a:solidFill>
                   <a:srgbClr val="16202C"/>
                 </a:solidFill>
@@ -6091,7 +6379,7 @@
               </a:rPr>
               <a:t>Narita → Hakone bus</a:t>
             </a:r>
-            <a:endParaRPr lang="en-US" sz="1500" dirty="0"/>
+            <a:endParaRPr lang="en-US" sz="1400" dirty="0"/>
           </a:p>
         </p:txBody>
       </p:sp>
@@ -6103,7 +6391,7 @@
         </p:nvSpPr>
         <p:spPr>
           <a:xfrm>
-            <a:off x="4937760" y="2487168"/>
+            <a:off x="4937760" y="2313432"/>
             <a:ext cx="914400" cy="237744"/>
           </a:xfrm>
           <a:prstGeom prst="rect">
@@ -6142,7 +6430,7 @@
         </p:nvSpPr>
         <p:spPr>
           <a:xfrm>
-            <a:off x="5989320" y="2459736"/>
+            <a:off x="5989320" y="2286000"/>
             <a:ext cx="4114800" cy="292608"/>
           </a:xfrm>
           <a:prstGeom prst="rect">
@@ -6159,7 +6447,7 @@
               <a:buNone/>
             </a:pPr>
             <a:r>
-              <a:rPr lang="en-US" sz="1300" dirty="0">
+              <a:rPr lang="en-US" sz="1250" dirty="0">
                 <a:solidFill>
                   <a:srgbClr val="5D6B7C"/>
                 </a:solidFill>
@@ -6169,7 +6457,7 @@
               </a:rPr>
               <a:t>Departs before the replacement lands</a:t>
             </a:r>
-            <a:endParaRPr lang="en-US" sz="1300" dirty="0"/>
+            <a:endParaRPr lang="en-US" sz="1250" dirty="0"/>
           </a:p>
         </p:txBody>
       </p:sp>
@@ -6181,7 +6469,7 @@
         </p:nvSpPr>
         <p:spPr>
           <a:xfrm>
-            <a:off x="658368" y="3246120"/>
+            <a:off x="658368" y="2953512"/>
             <a:ext cx="164592" cy="164592"/>
           </a:xfrm>
           <a:prstGeom prst="ellipse">
@@ -6201,7 +6489,7 @@
         </p:nvSpPr>
         <p:spPr>
           <a:xfrm>
-            <a:off x="1024128" y="3118104"/>
+            <a:off x="1024128" y="2834640"/>
             <a:ext cx="3840480" cy="274320"/>
           </a:xfrm>
           <a:prstGeom prst="rect">
@@ -6218,7 +6506,7 @@
               <a:buNone/>
             </a:pPr>
             <a:r>
-              <a:rPr lang="en-US" sz="1500" b="1" dirty="0">
+              <a:rPr lang="en-US" sz="1400" b="1" dirty="0">
                 <a:solidFill>
                   <a:srgbClr val="16202C"/>
                 </a:solidFill>
@@ -6228,7 +6516,7 @@
               </a:rPr>
               <a:t>Hakone hotel</a:t>
             </a:r>
-            <a:endParaRPr lang="en-US" sz="1500" dirty="0"/>
+            <a:endParaRPr lang="en-US" sz="1400" dirty="0"/>
           </a:p>
         </p:txBody>
       </p:sp>
@@ -6240,7 +6528,7 @@
         </p:nvSpPr>
         <p:spPr>
           <a:xfrm>
-            <a:off x="4937760" y="3145536"/>
+            <a:off x="4937760" y="2862072"/>
             <a:ext cx="914400" cy="237744"/>
           </a:xfrm>
           <a:prstGeom prst="rect">
@@ -6279,7 +6567,7 @@
         </p:nvSpPr>
         <p:spPr>
           <a:xfrm>
-            <a:off x="5989320" y="3118104"/>
+            <a:off x="5989320" y="2834640"/>
             <a:ext cx="4114800" cy="292608"/>
           </a:xfrm>
           <a:prstGeom prst="rect">
@@ -6296,7 +6584,7 @@
               <a:buNone/>
             </a:pPr>
             <a:r>
-              <a:rPr lang="en-US" sz="1300" dirty="0">
+              <a:rPr lang="en-US" sz="1250" dirty="0">
                 <a:solidFill>
                   <a:srgbClr val="5D6B7C"/>
                 </a:solidFill>
@@ -6306,7 +6594,7 @@
               </a:rPr>
               <a:t>No-show risk on a non-refundable night</a:t>
             </a:r>
-            <a:endParaRPr lang="en-US" sz="1300" dirty="0"/>
+            <a:endParaRPr lang="en-US" sz="1250" dirty="0"/>
           </a:p>
         </p:txBody>
       </p:sp>
@@ -6318,7 +6606,7 @@
         </p:nvSpPr>
         <p:spPr>
           <a:xfrm>
-            <a:off x="658368" y="3904488"/>
+            <a:off x="658368" y="3502152"/>
             <a:ext cx="164592" cy="164592"/>
           </a:xfrm>
           <a:prstGeom prst="ellipse">
@@ -6338,7 +6626,7 @@
         </p:nvSpPr>
         <p:spPr>
           <a:xfrm>
-            <a:off x="1024128" y="3776472"/>
+            <a:off x="1024128" y="3383280"/>
             <a:ext cx="3840480" cy="274320"/>
           </a:xfrm>
           <a:prstGeom prst="rect">
@@ -6355,7 +6643,7 @@
               <a:buNone/>
             </a:pPr>
             <a:r>
-              <a:rPr lang="en-US" sz="1500" b="1" dirty="0">
+              <a:rPr lang="en-US" sz="1400" b="1" dirty="0">
                 <a:solidFill>
                   <a:srgbClr val="16202C"/>
                 </a:solidFill>
@@ -6365,7 +6653,7 @@
               </a:rPr>
               <a:t>Rental car pickup</a:t>
             </a:r>
-            <a:endParaRPr lang="en-US" sz="1500" dirty="0"/>
+            <a:endParaRPr lang="en-US" sz="1400" dirty="0"/>
           </a:p>
         </p:txBody>
       </p:sp>
@@ -6377,7 +6665,7 @@
         </p:nvSpPr>
         <p:spPr>
           <a:xfrm>
-            <a:off x="4937760" y="3803904"/>
+            <a:off x="4937760" y="3410712"/>
             <a:ext cx="914400" cy="237744"/>
           </a:xfrm>
           <a:prstGeom prst="rect">
@@ -6416,7 +6704,7 @@
         </p:nvSpPr>
         <p:spPr>
           <a:xfrm>
-            <a:off x="5989320" y="3776472"/>
+            <a:off x="5989320" y="3383280"/>
             <a:ext cx="4114800" cy="292608"/>
           </a:xfrm>
           <a:prstGeom prst="rect">
@@ -6433,7 +6721,7 @@
               <a:buNone/>
             </a:pPr>
             <a:r>
-              <a:rPr lang="en-US" sz="1300" dirty="0">
+              <a:rPr lang="en-US" sz="1250" dirty="0">
                 <a:solidFill>
                   <a:srgbClr val="5D6B7C"/>
                 </a:solidFill>
@@ -6443,7 +6731,7 @@
               </a:rPr>
               <a:t>Pickup window passes before arrival</a:t>
             </a:r>
-            <a:endParaRPr lang="en-US" sz="1300" dirty="0"/>
+            <a:endParaRPr lang="en-US" sz="1250" dirty="0"/>
           </a:p>
         </p:txBody>
       </p:sp>
@@ -6455,7 +6743,7 @@
         </p:nvSpPr>
         <p:spPr>
           <a:xfrm>
-            <a:off x="658368" y="4562856"/>
+            <a:off x="658368" y="4050792"/>
             <a:ext cx="164592" cy="164592"/>
           </a:xfrm>
           <a:prstGeom prst="ellipse">
@@ -6475,7 +6763,7 @@
         </p:nvSpPr>
         <p:spPr>
           <a:xfrm>
-            <a:off x="1024128" y="4434840"/>
+            <a:off x="1024128" y="3931920"/>
             <a:ext cx="3840480" cy="274320"/>
           </a:xfrm>
           <a:prstGeom prst="rect">
@@ -6492,7 +6780,7 @@
               <a:buNone/>
             </a:pPr>
             <a:r>
-              <a:rPr lang="en-US" sz="1500" b="1" dirty="0">
+              <a:rPr lang="en-US" sz="1400" b="1" dirty="0">
                 <a:solidFill>
                   <a:srgbClr val="16202C"/>
                 </a:solidFill>
@@ -6502,7 +6790,7 @@
               </a:rPr>
               <a:t>Mount Fuji activity</a:t>
             </a:r>
-            <a:endParaRPr lang="en-US" sz="1500" dirty="0"/>
+            <a:endParaRPr lang="en-US" sz="1400" dirty="0"/>
           </a:p>
         </p:txBody>
       </p:sp>
@@ -6514,7 +6802,7 @@
         </p:nvSpPr>
         <p:spPr>
           <a:xfrm>
-            <a:off x="4937760" y="4462272"/>
+            <a:off x="4937760" y="3959352"/>
             <a:ext cx="914400" cy="237744"/>
           </a:xfrm>
           <a:prstGeom prst="rect">
@@ -6553,7 +6841,7 @@
         </p:nvSpPr>
         <p:spPr>
           <a:xfrm>
-            <a:off x="5989320" y="4434840"/>
+            <a:off x="5989320" y="3931920"/>
             <a:ext cx="4114800" cy="292608"/>
           </a:xfrm>
           <a:prstGeom prst="rect">
@@ -6570,7 +6858,7 @@
               <a:buNone/>
             </a:pPr>
             <a:r>
-              <a:rPr lang="en-US" sz="1300" dirty="0">
+              <a:rPr lang="en-US" sz="1250" dirty="0">
                 <a:solidFill>
                   <a:srgbClr val="5D6B7C"/>
                 </a:solidFill>
@@ -6580,7 +6868,7 @@
               </a:rPr>
               <a:t>Prerequisites can no longer be met</a:t>
             </a:r>
-            <a:endParaRPr lang="en-US" sz="1300" dirty="0"/>
+            <a:endParaRPr lang="en-US" sz="1250" dirty="0"/>
           </a:p>
         </p:txBody>
       </p:sp>
@@ -6592,8 +6880,282 @@
         </p:nvSpPr>
         <p:spPr>
           <a:xfrm>
-            <a:off x="9829800" y="1737360"/>
-            <a:ext cx="1719072" cy="3383280"/>
+            <a:off x="658368" y="4599432"/>
+            <a:ext cx="164592" cy="164592"/>
+          </a:xfrm>
+          <a:prstGeom prst="ellipse">
+            <a:avLst/>
+          </a:prstGeom>
+          <a:solidFill>
+            <a:srgbClr val="1E9E63"/>
+          </a:solidFill>
+          <a:ln/>
+        </p:spPr>
+      </p:sp>
+      <p:sp>
+        <p:nvSpPr>
+          <p:cNvPr id="26" name="Text 24"/>
+          <p:cNvSpPr txBox="1"/>
+          <p:nvPr/>
+        </p:nvSpPr>
+        <p:spPr>
+          <a:xfrm>
+            <a:off x="1024128" y="4480560"/>
+            <a:ext cx="3840480" cy="274320"/>
+          </a:xfrm>
+          <a:prstGeom prst="rect">
+            <a:avLst/>
+          </a:prstGeom>
+          <a:noFill/>
+          <a:ln/>
+        </p:spPr>
+        <p:txBody>
+          <a:bodyPr wrap="square" lIns="0" tIns="0" rIns="0" bIns="0" rtlCol="0" anchor="ctr"/>
+          <a:lstStyle/>
+          <a:p>
+            <a:pPr indent="0" marL="0">
+              <a:buNone/>
+            </a:pPr>
+            <a:r>
+              <a:rPr lang="en-US" sz="1400" b="1" dirty="0">
+                <a:solidFill>
+                  <a:srgbClr val="16202C"/>
+                </a:solidFill>
+                <a:latin typeface="Calibri" pitchFamily="34" charset="0"/>
+                <a:ea typeface="Calibri" pitchFamily="34" charset="-122"/>
+                <a:cs typeface="Calibri" pitchFamily="34" charset="-120"/>
+              </a:rPr>
+              <a:t>Hakone to Narita transfer</a:t>
+            </a:r>
+            <a:endParaRPr lang="en-US" sz="1400" dirty="0"/>
+          </a:p>
+        </p:txBody>
+      </p:sp>
+      <p:sp>
+        <p:nvSpPr>
+          <p:cNvPr id="27" name="Text 25"/>
+          <p:cNvSpPr txBox="1"/>
+          <p:nvPr/>
+        </p:nvSpPr>
+        <p:spPr>
+          <a:xfrm>
+            <a:off x="4937760" y="4507992"/>
+            <a:ext cx="914400" cy="237744"/>
+          </a:xfrm>
+          <a:prstGeom prst="rect">
+            <a:avLst/>
+          </a:prstGeom>
+          <a:noFill/>
+          <a:ln/>
+        </p:spPr>
+        <p:txBody>
+          <a:bodyPr wrap="square" lIns="0" tIns="0" rIns="0" bIns="0" rtlCol="0" anchor="ctr"/>
+          <a:lstStyle/>
+          <a:p>
+            <a:pPr indent="0" marL="0">
+              <a:buNone/>
+            </a:pPr>
+            <a:r>
+              <a:rPr lang="en-US" sz="1000" b="1" spc="100" kern="0" dirty="0">
+                <a:solidFill>
+                  <a:srgbClr val="1E9E63"/>
+                </a:solidFill>
+                <a:latin typeface="Calibri" pitchFamily="34" charset="0"/>
+                <a:ea typeface="Calibri" pitchFamily="34" charset="-122"/>
+                <a:cs typeface="Calibri" pitchFamily="34" charset="-120"/>
+              </a:rPr>
+              <a:t>SAFE</a:t>
+            </a:r>
+            <a:endParaRPr lang="en-US" sz="1000" dirty="0"/>
+          </a:p>
+        </p:txBody>
+      </p:sp>
+      <p:sp>
+        <p:nvSpPr>
+          <p:cNvPr id="28" name="Text 26"/>
+          <p:cNvSpPr txBox="1"/>
+          <p:nvPr/>
+        </p:nvSpPr>
+        <p:spPr>
+          <a:xfrm>
+            <a:off x="5989320" y="4480560"/>
+            <a:ext cx="4114800" cy="292608"/>
+          </a:xfrm>
+          <a:prstGeom prst="rect">
+            <a:avLst/>
+          </a:prstGeom>
+          <a:noFill/>
+          <a:ln/>
+        </p:spPr>
+        <p:txBody>
+          <a:bodyPr wrap="square" lIns="0" tIns="0" rIns="0" bIns="0" rtlCol="0" anchor="ctr"/>
+          <a:lstStyle/>
+          <a:p>
+            <a:pPr indent="0" marL="0">
+              <a:buNone/>
+            </a:pPr>
+            <a:r>
+              <a:rPr lang="en-US" sz="1250" dirty="0">
+                <a:solidFill>
+                  <a:srgbClr val="5D6B7C"/>
+                </a:solidFill>
+                <a:latin typeface="Calibri" pitchFamily="34" charset="0"/>
+                <a:ea typeface="Calibri" pitchFamily="34" charset="-122"/>
+                <a:cs typeface="Calibri" pitchFamily="34" charset="-120"/>
+              </a:rPr>
+              <a:t>Four days later, still feasible</a:t>
+            </a:r>
+            <a:endParaRPr lang="en-US" sz="1250" dirty="0"/>
+          </a:p>
+        </p:txBody>
+      </p:sp>
+      <p:sp>
+        <p:nvSpPr>
+          <p:cNvPr id="29" name="Shape 27"/>
+          <p:cNvSpPr/>
+          <p:nvPr/>
+        </p:nvSpPr>
+        <p:spPr>
+          <a:xfrm>
+            <a:off x="658368" y="5148072"/>
+            <a:ext cx="164592" cy="164592"/>
+          </a:xfrm>
+          <a:prstGeom prst="ellipse">
+            <a:avLst/>
+          </a:prstGeom>
+          <a:solidFill>
+            <a:srgbClr val="1E9E63"/>
+          </a:solidFill>
+          <a:ln/>
+        </p:spPr>
+      </p:sp>
+      <p:sp>
+        <p:nvSpPr>
+          <p:cNvPr id="30" name="Text 28"/>
+          <p:cNvSpPr txBox="1"/>
+          <p:nvPr/>
+        </p:nvSpPr>
+        <p:spPr>
+          <a:xfrm>
+            <a:off x="1024128" y="5029200"/>
+            <a:ext cx="3840480" cy="274320"/>
+          </a:xfrm>
+          <a:prstGeom prst="rect">
+            <a:avLst/>
+          </a:prstGeom>
+          <a:noFill/>
+          <a:ln/>
+        </p:spPr>
+        <p:txBody>
+          <a:bodyPr wrap="square" lIns="0" tIns="0" rIns="0" bIns="0" rtlCol="0" anchor="ctr"/>
+          <a:lstStyle/>
+          <a:p>
+            <a:pPr indent="0" marL="0">
+              <a:buNone/>
+            </a:pPr>
+            <a:r>
+              <a:rPr lang="en-US" sz="1400" b="1" dirty="0">
+                <a:solidFill>
+                  <a:srgbClr val="16202C"/>
+                </a:solidFill>
+                <a:latin typeface="Calibri" pitchFamily="34" charset="0"/>
+                <a:ea typeface="Calibri" pitchFamily="34" charset="-122"/>
+                <a:cs typeface="Calibri" pitchFamily="34" charset="-120"/>
+              </a:rPr>
+              <a:t>Narita to Singapore flight</a:t>
+            </a:r>
+            <a:endParaRPr lang="en-US" sz="1400" dirty="0"/>
+          </a:p>
+        </p:txBody>
+      </p:sp>
+      <p:sp>
+        <p:nvSpPr>
+          <p:cNvPr id="31" name="Text 29"/>
+          <p:cNvSpPr txBox="1"/>
+          <p:nvPr/>
+        </p:nvSpPr>
+        <p:spPr>
+          <a:xfrm>
+            <a:off x="4937760" y="5056632"/>
+            <a:ext cx="914400" cy="237744"/>
+          </a:xfrm>
+          <a:prstGeom prst="rect">
+            <a:avLst/>
+          </a:prstGeom>
+          <a:noFill/>
+          <a:ln/>
+        </p:spPr>
+        <p:txBody>
+          <a:bodyPr wrap="square" lIns="0" tIns="0" rIns="0" bIns="0" rtlCol="0" anchor="ctr"/>
+          <a:lstStyle/>
+          <a:p>
+            <a:pPr indent="0" marL="0">
+              <a:buNone/>
+            </a:pPr>
+            <a:r>
+              <a:rPr lang="en-US" sz="1000" b="1" spc="100" kern="0" dirty="0">
+                <a:solidFill>
+                  <a:srgbClr val="1E9E63"/>
+                </a:solidFill>
+                <a:latin typeface="Calibri" pitchFamily="34" charset="0"/>
+                <a:ea typeface="Calibri" pitchFamily="34" charset="-122"/>
+                <a:cs typeface="Calibri" pitchFamily="34" charset="-120"/>
+              </a:rPr>
+              <a:t>SAFE</a:t>
+            </a:r>
+            <a:endParaRPr lang="en-US" sz="1000" dirty="0"/>
+          </a:p>
+        </p:txBody>
+      </p:sp>
+      <p:sp>
+        <p:nvSpPr>
+          <p:cNvPr id="32" name="Text 30"/>
+          <p:cNvSpPr txBox="1"/>
+          <p:nvPr/>
+        </p:nvSpPr>
+        <p:spPr>
+          <a:xfrm>
+            <a:off x="5989320" y="5029200"/>
+            <a:ext cx="4114800" cy="292608"/>
+          </a:xfrm>
+          <a:prstGeom prst="rect">
+            <a:avLst/>
+          </a:prstGeom>
+          <a:noFill/>
+          <a:ln/>
+        </p:spPr>
+        <p:txBody>
+          <a:bodyPr wrap="square" lIns="0" tIns="0" rIns="0" bIns="0" rtlCol="0" anchor="ctr"/>
+          <a:lstStyle/>
+          <a:p>
+            <a:pPr indent="0" marL="0">
+              <a:buNone/>
+            </a:pPr>
+            <a:r>
+              <a:rPr lang="en-US" sz="1250" dirty="0">
+                <a:solidFill>
+                  <a:srgbClr val="5D6B7C"/>
+                </a:solidFill>
+                <a:latin typeface="Calibri" pitchFamily="34" charset="0"/>
+                <a:ea typeface="Calibri" pitchFamily="34" charset="-122"/>
+                <a:cs typeface="Calibri" pitchFamily="34" charset="-120"/>
+              </a:rPr>
+              <a:t>The journey home is untouched</a:t>
+            </a:r>
+            <a:endParaRPr lang="en-US" sz="1250" dirty="0"/>
+          </a:p>
+        </p:txBody>
+      </p:sp>
+      <p:sp>
+        <p:nvSpPr>
+          <p:cNvPr id="33" name="Shape 31"/>
+          <p:cNvSpPr/>
+          <p:nvPr/>
+        </p:nvSpPr>
+        <p:spPr>
+          <a:xfrm>
+            <a:off x="9829800" y="1691640"/>
+            <a:ext cx="1719072" cy="4160520"/>
           </a:xfrm>
           <a:prstGeom prst="roundRect">
             <a:avLst>
@@ -6613,7 +7175,7 @@
       </p:sp>
       <p:sp>
         <p:nvSpPr>
-          <p:cNvPr id="26" name="Text 24"/>
+          <p:cNvPr id="34" name="Text 32"/>
           <p:cNvSpPr txBox="1"/>
           <p:nvPr/>
         </p:nvSpPr>
@@ -6652,7 +7214,7 @@
       </p:sp>
       <p:sp>
         <p:nvSpPr>
-          <p:cNvPr id="27" name="Text 25"/>
+          <p:cNvPr id="35" name="Text 33"/>
           <p:cNvSpPr txBox="1"/>
           <p:nvPr/>
         </p:nvSpPr>
@@ -6691,7 +7253,7 @@
       </p:sp>
       <p:sp>
         <p:nvSpPr>
-          <p:cNvPr id="28" name="Text 26"/>
+          <p:cNvPr id="36" name="Text 34"/>
           <p:cNvSpPr txBox="1"/>
           <p:nvPr/>
         </p:nvSpPr>
@@ -6730,7 +7292,7 @@
       </p:sp>
       <p:sp>
         <p:nvSpPr>
-          <p:cNvPr id="29" name="Text 27"/>
+          <p:cNvPr id="37" name="Text 35"/>
           <p:cNvSpPr txBox="1"/>
           <p:nvPr/>
         </p:nvSpPr>
@@ -6769,14 +7331,14 @@
       </p:sp>
       <p:sp>
         <p:nvSpPr>
-          <p:cNvPr id="30" name="Text 28"/>
-          <p:cNvSpPr txBox="1"/>
-          <p:nvPr/>
-        </p:nvSpPr>
-        <p:spPr>
-          <a:xfrm>
-            <a:off x="9966960" y="4434840"/>
-            <a:ext cx="1463040" cy="548640"/>
+          <p:cNvPr id="38" name="Text 36"/>
+          <p:cNvSpPr txBox="1"/>
+          <p:nvPr/>
+        </p:nvSpPr>
+        <p:spPr>
+          <a:xfrm>
+            <a:off x="9966960" y="4590288"/>
+            <a:ext cx="1463040" cy="685800"/>
           </a:xfrm>
           <a:prstGeom prst="rect">
             <a:avLst/>
@@ -6792,47 +7354,69 @@
               <a:buNone/>
             </a:pPr>
             <a:r>
-              <a:rPr lang="en-US" sz="1100" dirty="0">
-                <a:solidFill>
-                  <a:srgbClr val="5D6B7C"/>
-                </a:solidFill>
-                <a:latin typeface="Calibri" pitchFamily="34" charset="0"/>
-                <a:ea typeface="Calibri" pitchFamily="34" charset="-122"/>
-                <a:cs typeface="Calibri" pitchFamily="34" charset="-120"/>
-              </a:rPr>
-              <a:t>from one</a:t>
-            </a:r>
-            <a:endParaRPr lang="en-US" sz="1100" dirty="0"/>
-          </a:p>
+              <a:rPr lang="en-US" sz="5200" b="1" dirty="0">
+                <a:solidFill>
+                  <a:srgbClr val="1E9E63"/>
+                </a:solidFill>
+                <a:latin typeface="Cambria" pitchFamily="34" charset="0"/>
+                <a:ea typeface="Cambria" pitchFamily="34" charset="-122"/>
+                <a:cs typeface="Cambria" pitchFamily="34" charset="-120"/>
+              </a:rPr>
+              <a:t>2</a:t>
+            </a:r>
+            <a:endParaRPr lang="en-US" sz="5200" dirty="0"/>
+          </a:p>
+        </p:txBody>
+      </p:sp>
+      <p:sp>
+        <p:nvSpPr>
+          <p:cNvPr id="39" name="Text 37"/>
+          <p:cNvSpPr txBox="1"/>
+          <p:nvPr/>
+        </p:nvSpPr>
+        <p:spPr>
+          <a:xfrm>
+            <a:off x="9966960" y="5257800"/>
+            <a:ext cx="1463040" cy="274320"/>
+          </a:xfrm>
+          <a:prstGeom prst="rect">
+            <a:avLst/>
+          </a:prstGeom>
+          <a:noFill/>
+          <a:ln/>
+        </p:spPr>
+        <p:txBody>
+          <a:bodyPr wrap="square" lIns="0" tIns="0" rIns="0" bIns="0" rtlCol="0" anchor="ctr"/>
+          <a:lstStyle/>
           <a:p>
             <a:pPr algn="ctr" indent="0" marL="0">
               <a:buNone/>
             </a:pPr>
             <a:r>
-              <a:rPr lang="en-US" sz="1100" dirty="0">
-                <a:solidFill>
-                  <a:srgbClr val="5D6B7C"/>
-                </a:solidFill>
-                <a:latin typeface="Calibri" pitchFamily="34" charset="0"/>
-                <a:ea typeface="Calibri" pitchFamily="34" charset="-122"/>
-                <a:cs typeface="Calibri" pitchFamily="34" charset="-120"/>
-              </a:rPr>
-              <a:t>cancelled flight</a:t>
-            </a:r>
-            <a:endParaRPr lang="en-US" sz="1100" dirty="0"/>
-          </a:p>
-        </p:txBody>
-      </p:sp>
-      <p:sp>
-        <p:nvSpPr>
-          <p:cNvPr id="31" name="Text 29"/>
-          <p:cNvSpPr txBox="1"/>
-          <p:nvPr/>
-        </p:nvSpPr>
-        <p:spPr>
-          <a:xfrm>
-            <a:off x="640080" y="5440680"/>
-            <a:ext cx="10881360" cy="457200"/>
+              <a:rPr lang="en-US" sz="1300" dirty="0">
+                <a:solidFill>
+                  <a:srgbClr val="C6D4E6"/>
+                </a:solidFill>
+                <a:latin typeface="Calibri" pitchFamily="34" charset="0"/>
+                <a:ea typeface="Calibri" pitchFamily="34" charset="-122"/>
+                <a:cs typeface="Calibri" pitchFamily="34" charset="-120"/>
+              </a:rPr>
+              <a:t>untouched</a:t>
+            </a:r>
+            <a:endParaRPr lang="en-US" sz="1300" dirty="0"/>
+          </a:p>
+        </p:txBody>
+      </p:sp>
+      <p:sp>
+        <p:nvSpPr>
+          <p:cNvPr id="40" name="Text 38"/>
+          <p:cNvSpPr txBox="1"/>
+          <p:nvPr/>
+        </p:nvSpPr>
+        <p:spPr>
+          <a:xfrm>
+            <a:off x="640080" y="6035040"/>
+            <a:ext cx="9601200" cy="457200"/>
           </a:xfrm>
           <a:prstGeom prst="rect">
             <a:avLst/>
@@ -6856,7 +7440,7 @@
                 <a:ea typeface="Calibri" pitchFamily="34" charset="-122"/>
                 <a:cs typeface="Calibri" pitchFamily="34" charset="-120"/>
               </a:rPr>
-              <a:t>The real problem is not "find me another flight." It is "one booking broke — fix the consequences across my whole trip."</a:t>
+              <a:t>Knowing what is still fine matters as much as knowing what broke. The return home is never touched.</a:t>
             </a:r>
             <a:endParaRPr lang="en-US" sz="1600" dirty="0"/>
           </a:p>

--- a/docs/TripRescue-pitch.pptx
+++ b/docs/TripRescue-pitch.pptx
@@ -2323,7 +2323,7 @@
             <a:r>
               <a:rPr lang="en-US" sz="1100" b="1" spc="200" kern="0" dirty="0">
                 <a:solidFill>
-                  <a:srgbClr val="3B6FE0"/>
+                  <a:srgbClr val="0067E5"/>
                 </a:solidFill>
                 <a:latin typeface="Calibri" pitchFamily="34" charset="0"/>
                 <a:ea typeface="Calibri" pitchFamily="34" charset="-122"/>
@@ -3399,7 +3399,7 @@
             <a:r>
               <a:rPr lang="en-US" sz="1100" b="1" spc="200" kern="0" dirty="0">
                 <a:solidFill>
-                  <a:srgbClr val="3B6FE0"/>
+                  <a:srgbClr val="0067E5"/>
                 </a:solidFill>
                 <a:latin typeface="Calibri" pitchFamily="34" charset="0"/>
                 <a:ea typeface="Calibri" pitchFamily="34" charset="-122"/>
@@ -3438,7 +3438,7 @@
             <a:r>
               <a:rPr lang="en-US" sz="3400" b="1" dirty="0">
                 <a:solidFill>
-                  <a:srgbClr val="16202C"/>
+                  <a:srgbClr val="141A1F"/>
                 </a:solidFill>
                 <a:latin typeface="Cambria" pitchFamily="34" charset="0"/>
                 <a:ea typeface="Cambria" pitchFamily="34" charset="-122"/>
@@ -3504,7 +3504,7 @@
             <a:r>
               <a:rPr lang="en-US" sz="1800" b="1" dirty="0">
                 <a:solidFill>
-                  <a:srgbClr val="16202C"/>
+                  <a:srgbClr val="141A1F"/>
                 </a:solidFill>
                 <a:latin typeface="Calibri" pitchFamily="34" charset="0"/>
                 <a:ea typeface="Calibri" pitchFamily="34" charset="-122"/>
@@ -3621,7 +3621,7 @@
             <a:r>
               <a:rPr lang="en-US" sz="1250" b="1" i="1" dirty="0">
                 <a:solidFill>
-                  <a:srgbClr val="16202C"/>
+                  <a:srgbClr val="141A1F"/>
                 </a:solidFill>
                 <a:latin typeface="Calibri" pitchFamily="34" charset="0"/>
                 <a:ea typeface="Calibri" pitchFamily="34" charset="-122"/>
@@ -3726,7 +3726,7 @@
             <a:r>
               <a:rPr lang="en-US" sz="2100" b="1" dirty="0">
                 <a:solidFill>
-                  <a:srgbClr val="6C9BFF"/>
+                  <a:srgbClr val="6FA8FF"/>
                 </a:solidFill>
                 <a:latin typeface="Cambria" pitchFamily="34" charset="0"/>
                 <a:ea typeface="Cambria" pitchFamily="34" charset="-122"/>
@@ -3870,7 +3870,7 @@
             <a:r>
               <a:rPr lang="en-US" sz="1800" b="1" dirty="0">
                 <a:solidFill>
-                  <a:srgbClr val="16202C"/>
+                  <a:srgbClr val="141A1F"/>
                 </a:solidFill>
                 <a:latin typeface="Calibri" pitchFamily="34" charset="0"/>
                 <a:ea typeface="Calibri" pitchFamily="34" charset="-122"/>
@@ -3987,7 +3987,7 @@
             <a:r>
               <a:rPr lang="en-US" sz="1250" b="1" i="1" dirty="0">
                 <a:solidFill>
-                  <a:srgbClr val="16202C"/>
+                  <a:srgbClr val="141A1F"/>
                 </a:solidFill>
                 <a:latin typeface="Calibri" pitchFamily="34" charset="0"/>
                 <a:ea typeface="Calibri" pitchFamily="34" charset="-122"/>
@@ -4053,7 +4053,7 @@
             <a:r>
               <a:rPr lang="en-US" sz="1400" b="1" dirty="0">
                 <a:solidFill>
-                  <a:srgbClr val="16202C"/>
+                  <a:srgbClr val="141A1F"/>
                 </a:solidFill>
                 <a:latin typeface="Calibri" pitchFamily="34" charset="0"/>
                 <a:ea typeface="Calibri" pitchFamily="34" charset="-122"/>
@@ -4629,7 +4629,7 @@
             <a:r>
               <a:rPr lang="en-US" sz="1400" dirty="0">
                 <a:solidFill>
-                  <a:srgbClr val="3B6FE0"/>
+                  <a:srgbClr val="0067E5"/>
                 </a:solidFill>
                 <a:latin typeface="Courier New" pitchFamily="34" charset="0"/>
                 <a:ea typeface="Courier New" pitchFamily="34" charset="-122"/>
@@ -4739,7 +4739,7 @@
             <a:r>
               <a:rPr lang="en-US" sz="1100" b="1" spc="200" kern="0" dirty="0">
                 <a:solidFill>
-                  <a:srgbClr val="3B6FE0"/>
+                  <a:srgbClr val="0067E5"/>
                 </a:solidFill>
                 <a:latin typeface="Calibri" pitchFamily="34" charset="0"/>
                 <a:ea typeface="Calibri" pitchFamily="34" charset="-122"/>
@@ -4778,7 +4778,7 @@
             <a:r>
               <a:rPr lang="en-US" sz="3400" b="1" dirty="0">
                 <a:solidFill>
-                  <a:srgbClr val="16202C"/>
+                  <a:srgbClr val="141A1F"/>
                 </a:solidFill>
                 <a:latin typeface="Cambria" pitchFamily="34" charset="0"/>
                 <a:ea typeface="Cambria" pitchFamily="34" charset="-122"/>
@@ -4844,7 +4844,7 @@
             <a:r>
               <a:rPr lang="en-US" sz="1200" b="1" dirty="0">
                 <a:solidFill>
-                  <a:srgbClr val="16202C"/>
+                  <a:srgbClr val="141A1F"/>
                 </a:solidFill>
                 <a:latin typeface="Calibri" pitchFamily="34" charset="0"/>
                 <a:ea typeface="Calibri" pitchFamily="34" charset="-122"/>
@@ -4988,7 +4988,7 @@
             <a:r>
               <a:rPr lang="en-US" sz="1200" b="1" dirty="0">
                 <a:solidFill>
-                  <a:srgbClr val="16202C"/>
+                  <a:srgbClr val="141A1F"/>
                 </a:solidFill>
                 <a:latin typeface="Calibri" pitchFamily="34" charset="0"/>
                 <a:ea typeface="Calibri" pitchFamily="34" charset="-122"/>
@@ -5132,7 +5132,7 @@
             <a:r>
               <a:rPr lang="en-US" sz="1200" b="1" dirty="0">
                 <a:solidFill>
-                  <a:srgbClr val="16202C"/>
+                  <a:srgbClr val="141A1F"/>
                 </a:solidFill>
                 <a:latin typeface="Calibri" pitchFamily="34" charset="0"/>
                 <a:ea typeface="Calibri" pitchFamily="34" charset="-122"/>
@@ -5276,7 +5276,7 @@
             <a:r>
               <a:rPr lang="en-US" sz="1200" b="1" dirty="0">
                 <a:solidFill>
-                  <a:srgbClr val="16202C"/>
+                  <a:srgbClr val="141A1F"/>
                 </a:solidFill>
                 <a:latin typeface="Calibri" pitchFamily="34" charset="0"/>
                 <a:ea typeface="Calibri" pitchFamily="34" charset="-122"/>
@@ -5420,7 +5420,7 @@
             <a:r>
               <a:rPr lang="en-US" sz="1200" b="1" dirty="0">
                 <a:solidFill>
-                  <a:srgbClr val="16202C"/>
+                  <a:srgbClr val="141A1F"/>
                 </a:solidFill>
                 <a:latin typeface="Calibri" pitchFamily="34" charset="0"/>
                 <a:ea typeface="Calibri" pitchFamily="34" charset="-122"/>
@@ -5564,7 +5564,7 @@
             <a:r>
               <a:rPr lang="en-US" sz="1200" b="1" dirty="0">
                 <a:solidFill>
-                  <a:srgbClr val="16202C"/>
+                  <a:srgbClr val="141A1F"/>
                 </a:solidFill>
                 <a:latin typeface="Calibri" pitchFamily="34" charset="0"/>
                 <a:ea typeface="Calibri" pitchFamily="34" charset="-122"/>
@@ -5708,7 +5708,7 @@
             <a:r>
               <a:rPr lang="en-US" sz="1200" b="1" dirty="0">
                 <a:solidFill>
-                  <a:srgbClr val="16202C"/>
+                  <a:srgbClr val="141A1F"/>
                 </a:solidFill>
                 <a:latin typeface="Calibri" pitchFamily="34" charset="0"/>
                 <a:ea typeface="Calibri" pitchFamily="34" charset="-122"/>
@@ -5852,7 +5852,7 @@
             <a:r>
               <a:rPr lang="en-US" sz="1700" b="1" dirty="0">
                 <a:solidFill>
-                  <a:srgbClr val="16202C"/>
+                  <a:srgbClr val="141A1F"/>
                 </a:solidFill>
                 <a:latin typeface="Calibri" pitchFamily="34" charset="0"/>
                 <a:ea typeface="Calibri" pitchFamily="34" charset="-122"/>
@@ -6113,7 +6113,7 @@
             <a:r>
               <a:rPr lang="en-US" sz="1100" b="1" spc="200" kern="0" dirty="0">
                 <a:solidFill>
-                  <a:srgbClr val="3B6FE0"/>
+                  <a:srgbClr val="0067E5"/>
                 </a:solidFill>
                 <a:latin typeface="Calibri" pitchFamily="34" charset="0"/>
                 <a:ea typeface="Calibri" pitchFamily="34" charset="-122"/>
@@ -6152,7 +6152,7 @@
             <a:r>
               <a:rPr lang="en-US" sz="3400" b="1" dirty="0">
                 <a:solidFill>
-                  <a:srgbClr val="16202C"/>
+                  <a:srgbClr val="141A1F"/>
                 </a:solidFill>
                 <a:latin typeface="Cambria" pitchFamily="34" charset="0"/>
                 <a:ea typeface="Cambria" pitchFamily="34" charset="-122"/>
@@ -6234,7 +6234,7 @@
             <a:r>
               <a:rPr lang="en-US" sz="1400" b="1" dirty="0">
                 <a:solidFill>
-                  <a:srgbClr val="16202C"/>
+                  <a:srgbClr val="141A1F"/>
                 </a:solidFill>
                 <a:latin typeface="Calibri" pitchFamily="34" charset="0"/>
                 <a:ea typeface="Calibri" pitchFamily="34" charset="-122"/>
@@ -6371,7 +6371,7 @@
             <a:r>
               <a:rPr lang="en-US" sz="1400" b="1" dirty="0">
                 <a:solidFill>
-                  <a:srgbClr val="16202C"/>
+                  <a:srgbClr val="141A1F"/>
                 </a:solidFill>
                 <a:latin typeface="Calibri" pitchFamily="34" charset="0"/>
                 <a:ea typeface="Calibri" pitchFamily="34" charset="-122"/>
@@ -6508,7 +6508,7 @@
             <a:r>
               <a:rPr lang="en-US" sz="1400" b="1" dirty="0">
                 <a:solidFill>
-                  <a:srgbClr val="16202C"/>
+                  <a:srgbClr val="141A1F"/>
                 </a:solidFill>
                 <a:latin typeface="Calibri" pitchFamily="34" charset="0"/>
                 <a:ea typeface="Calibri" pitchFamily="34" charset="-122"/>
@@ -6645,7 +6645,7 @@
             <a:r>
               <a:rPr lang="en-US" sz="1400" b="1" dirty="0">
                 <a:solidFill>
-                  <a:srgbClr val="16202C"/>
+                  <a:srgbClr val="141A1F"/>
                 </a:solidFill>
                 <a:latin typeface="Calibri" pitchFamily="34" charset="0"/>
                 <a:ea typeface="Calibri" pitchFamily="34" charset="-122"/>
@@ -6782,7 +6782,7 @@
             <a:r>
               <a:rPr lang="en-US" sz="1400" b="1" dirty="0">
                 <a:solidFill>
-                  <a:srgbClr val="16202C"/>
+                  <a:srgbClr val="141A1F"/>
                 </a:solidFill>
                 <a:latin typeface="Calibri" pitchFamily="34" charset="0"/>
                 <a:ea typeface="Calibri" pitchFamily="34" charset="-122"/>
@@ -6919,7 +6919,7 @@
             <a:r>
               <a:rPr lang="en-US" sz="1400" b="1" dirty="0">
                 <a:solidFill>
-                  <a:srgbClr val="16202C"/>
+                  <a:srgbClr val="141A1F"/>
                 </a:solidFill>
                 <a:latin typeface="Calibri" pitchFamily="34" charset="0"/>
                 <a:ea typeface="Calibri" pitchFamily="34" charset="-122"/>
@@ -7056,7 +7056,7 @@
             <a:r>
               <a:rPr lang="en-US" sz="1400" b="1" dirty="0">
                 <a:solidFill>
-                  <a:srgbClr val="16202C"/>
+                  <a:srgbClr val="141A1F"/>
                 </a:solidFill>
                 <a:latin typeface="Calibri" pitchFamily="34" charset="0"/>
                 <a:ea typeface="Calibri" pitchFamily="34" charset="-122"/>
@@ -7434,7 +7434,7 @@
             <a:r>
               <a:rPr lang="en-US" sz="1600" i="1" dirty="0">
                 <a:solidFill>
-                  <a:srgbClr val="16202C"/>
+                  <a:srgbClr val="141A1F"/>
                 </a:solidFill>
                 <a:latin typeface="Calibri" pitchFamily="34" charset="0"/>
                 <a:ea typeface="Calibri" pitchFamily="34" charset="-122"/>
@@ -7505,7 +7505,7 @@
             <a:r>
               <a:rPr lang="en-US" sz="1100" b="1" spc="200" kern="0" dirty="0">
                 <a:solidFill>
-                  <a:srgbClr val="3B6FE0"/>
+                  <a:srgbClr val="0067E5"/>
                 </a:solidFill>
                 <a:latin typeface="Calibri" pitchFamily="34" charset="0"/>
                 <a:ea typeface="Calibri" pitchFamily="34" charset="-122"/>
@@ -7544,7 +7544,7 @@
             <a:r>
               <a:rPr lang="en-US" sz="3400" b="1" dirty="0">
                 <a:solidFill>
-                  <a:srgbClr val="16202C"/>
+                  <a:srgbClr val="141A1F"/>
                 </a:solidFill>
                 <a:latin typeface="Cambria" pitchFamily="34" charset="0"/>
                 <a:ea typeface="Cambria" pitchFamily="34" charset="-122"/>
@@ -7610,7 +7610,7 @@
             <a:r>
               <a:rPr lang="en-US" sz="1800" b="1" dirty="0">
                 <a:solidFill>
-                  <a:srgbClr val="16202C"/>
+                  <a:srgbClr val="141A1F"/>
                 </a:solidFill>
                 <a:latin typeface="Calibri" pitchFamily="34" charset="0"/>
                 <a:ea typeface="Calibri" pitchFamily="34" charset="-122"/>
@@ -7708,7 +7708,7 @@
             <a:r>
               <a:rPr lang="en-US" sz="1300" b="1" dirty="0">
                 <a:solidFill>
-                  <a:srgbClr val="16202C"/>
+                  <a:srgbClr val="141A1F"/>
                 </a:solidFill>
                 <a:latin typeface="Calibri" pitchFamily="34" charset="0"/>
                 <a:ea typeface="Calibri" pitchFamily="34" charset="-122"/>
@@ -7774,7 +7774,7 @@
             <a:r>
               <a:rPr lang="en-US" sz="1800" b="1" dirty="0">
                 <a:solidFill>
-                  <a:srgbClr val="16202C"/>
+                  <a:srgbClr val="141A1F"/>
                 </a:solidFill>
                 <a:latin typeface="Calibri" pitchFamily="34" charset="0"/>
                 <a:ea typeface="Calibri" pitchFamily="34" charset="-122"/>
@@ -7872,7 +7872,7 @@
             <a:r>
               <a:rPr lang="en-US" sz="1300" b="1" dirty="0">
                 <a:solidFill>
-                  <a:srgbClr val="16202C"/>
+                  <a:srgbClr val="141A1F"/>
                 </a:solidFill>
                 <a:latin typeface="Calibri" pitchFamily="34" charset="0"/>
                 <a:ea typeface="Calibri" pitchFamily="34" charset="-122"/>
@@ -7938,7 +7938,7 @@
             <a:r>
               <a:rPr lang="en-US" sz="1800" b="1" dirty="0">
                 <a:solidFill>
-                  <a:srgbClr val="16202C"/>
+                  <a:srgbClr val="141A1F"/>
                 </a:solidFill>
                 <a:latin typeface="Calibri" pitchFamily="34" charset="0"/>
                 <a:ea typeface="Calibri" pitchFamily="34" charset="-122"/>
@@ -8036,7 +8036,7 @@
             <a:r>
               <a:rPr lang="en-US" sz="1300" b="1" dirty="0">
                 <a:solidFill>
-                  <a:srgbClr val="16202C"/>
+                  <a:srgbClr val="141A1F"/>
                 </a:solidFill>
                 <a:latin typeface="Calibri" pitchFamily="34" charset="0"/>
                 <a:ea typeface="Calibri" pitchFamily="34" charset="-122"/>
@@ -8173,7 +8173,7 @@
             <a:r>
               <a:rPr lang="en-US" sz="1100" b="1" spc="200" kern="0" dirty="0">
                 <a:solidFill>
-                  <a:srgbClr val="3B6FE0"/>
+                  <a:srgbClr val="0067E5"/>
                 </a:solidFill>
                 <a:latin typeface="Calibri" pitchFamily="34" charset="0"/>
                 <a:ea typeface="Calibri" pitchFamily="34" charset="-122"/>
@@ -8212,7 +8212,7 @@
             <a:r>
               <a:rPr lang="en-US" sz="3400" b="1" dirty="0">
                 <a:solidFill>
-                  <a:srgbClr val="16202C"/>
+                  <a:srgbClr val="141A1F"/>
                 </a:solidFill>
                 <a:latin typeface="Cambria" pitchFamily="34" charset="0"/>
                 <a:ea typeface="Cambria" pitchFamily="34" charset="-122"/>
@@ -8239,7 +8239,7 @@
             <a:avLst/>
           </a:prstGeom>
           <a:solidFill>
-            <a:srgbClr val="3B6FE0"/>
+            <a:srgbClr val="0067E5"/>
           </a:solidFill>
           <a:ln/>
         </p:spPr>
@@ -8310,7 +8310,7 @@
             <a:r>
               <a:rPr lang="en-US" sz="1600" b="1" dirty="0">
                 <a:solidFill>
-                  <a:srgbClr val="16202C"/>
+                  <a:srgbClr val="141A1F"/>
                 </a:solidFill>
                 <a:latin typeface="Calibri" pitchFamily="34" charset="0"/>
                 <a:ea typeface="Calibri" pitchFamily="34" charset="-122"/>
@@ -8376,7 +8376,7 @@
             <a:avLst/>
           </a:prstGeom>
           <a:solidFill>
-            <a:srgbClr val="3B6FE0"/>
+            <a:srgbClr val="0067E5"/>
           </a:solidFill>
           <a:ln/>
         </p:spPr>
@@ -8447,7 +8447,7 @@
             <a:r>
               <a:rPr lang="en-US" sz="1600" b="1" dirty="0">
                 <a:solidFill>
-                  <a:srgbClr val="16202C"/>
+                  <a:srgbClr val="141A1F"/>
                 </a:solidFill>
                 <a:latin typeface="Calibri" pitchFamily="34" charset="0"/>
                 <a:ea typeface="Calibri" pitchFamily="34" charset="-122"/>
@@ -8513,7 +8513,7 @@
             <a:avLst/>
           </a:prstGeom>
           <a:solidFill>
-            <a:srgbClr val="3B6FE0"/>
+            <a:srgbClr val="0067E5"/>
           </a:solidFill>
           <a:ln/>
         </p:spPr>
@@ -8584,7 +8584,7 @@
             <a:r>
               <a:rPr lang="en-US" sz="1600" b="1" dirty="0">
                 <a:solidFill>
-                  <a:srgbClr val="16202C"/>
+                  <a:srgbClr val="141A1F"/>
                 </a:solidFill>
                 <a:latin typeface="Calibri" pitchFamily="34" charset="0"/>
                 <a:ea typeface="Calibri" pitchFamily="34" charset="-122"/>
@@ -8650,7 +8650,7 @@
             <a:avLst/>
           </a:prstGeom>
           <a:solidFill>
-            <a:srgbClr val="3B6FE0"/>
+            <a:srgbClr val="0067E5"/>
           </a:solidFill>
           <a:ln/>
         </p:spPr>
@@ -8721,7 +8721,7 @@
             <a:r>
               <a:rPr lang="en-US" sz="1600" b="1" dirty="0">
                 <a:solidFill>
-                  <a:srgbClr val="16202C"/>
+                  <a:srgbClr val="141A1F"/>
                 </a:solidFill>
                 <a:latin typeface="Calibri" pitchFamily="34" charset="0"/>
                 <a:ea typeface="Calibri" pitchFamily="34" charset="-122"/>
@@ -8826,7 +8826,7 @@
             <a:r>
               <a:rPr lang="en-US" sz="1100" b="1" spc="200" kern="0" dirty="0">
                 <a:solidFill>
-                  <a:srgbClr val="3B6FE0"/>
+                  <a:srgbClr val="0067E5"/>
                 </a:solidFill>
                 <a:latin typeface="Calibri" pitchFamily="34" charset="0"/>
                 <a:ea typeface="Calibri" pitchFamily="34" charset="-122"/>
@@ -9333,7 +9333,7 @@
             <a:r>
               <a:rPr lang="en-US" sz="1900" b="1" dirty="0">
                 <a:solidFill>
-                  <a:srgbClr val="16202C"/>
+                  <a:srgbClr val="141A1F"/>
                 </a:solidFill>
                 <a:latin typeface="Cambria" pitchFamily="34" charset="0"/>
                 <a:ea typeface="Cambria" pitchFamily="34" charset="-122"/>
@@ -9404,7 +9404,7 @@
             <a:r>
               <a:rPr lang="en-US" sz="1100" b="1" spc="200" kern="0" dirty="0">
                 <a:solidFill>
-                  <a:srgbClr val="3B6FE0"/>
+                  <a:srgbClr val="0067E5"/>
                 </a:solidFill>
                 <a:latin typeface="Calibri" pitchFamily="34" charset="0"/>
                 <a:ea typeface="Calibri" pitchFamily="34" charset="-122"/>
@@ -9443,7 +9443,7 @@
             <a:r>
               <a:rPr lang="en-US" sz="3400" b="1" dirty="0">
                 <a:solidFill>
-                  <a:srgbClr val="16202C"/>
+                  <a:srgbClr val="141A1F"/>
                 </a:solidFill>
                 <a:latin typeface="Cambria" pitchFamily="34" charset="0"/>
                 <a:ea typeface="Cambria" pitchFamily="34" charset="-122"/>
@@ -9509,7 +9509,7 @@
             <a:r>
               <a:rPr lang="en-US" sz="1900" b="1" dirty="0">
                 <a:solidFill>
-                  <a:srgbClr val="16202C"/>
+                  <a:srgbClr val="141A1F"/>
                 </a:solidFill>
                 <a:latin typeface="Calibri" pitchFamily="34" charset="0"/>
                 <a:ea typeface="Calibri" pitchFamily="34" charset="-122"/>
@@ -9626,7 +9626,7 @@
             <a:r>
               <a:rPr lang="en-US" sz="1400" b="1" dirty="0">
                 <a:solidFill>
-                  <a:srgbClr val="16202C"/>
+                  <a:srgbClr val="141A1F"/>
                 </a:solidFill>
                 <a:latin typeface="Calibri" pitchFamily="34" charset="0"/>
                 <a:ea typeface="Calibri" pitchFamily="34" charset="-122"/>
@@ -9704,7 +9704,7 @@
             <a:r>
               <a:rPr lang="en-US" sz="1400" b="1" dirty="0">
                 <a:solidFill>
-                  <a:srgbClr val="16202C"/>
+                  <a:srgbClr val="141A1F"/>
                 </a:solidFill>
                 <a:latin typeface="Calibri" pitchFamily="34" charset="0"/>
                 <a:ea typeface="Calibri" pitchFamily="34" charset="-122"/>
@@ -9782,7 +9782,7 @@
             <a:r>
               <a:rPr lang="en-US" sz="1400" b="1" dirty="0">
                 <a:solidFill>
-                  <a:srgbClr val="16202C"/>
+                  <a:srgbClr val="141A1F"/>
                 </a:solidFill>
                 <a:latin typeface="Calibri" pitchFamily="34" charset="0"/>
                 <a:ea typeface="Calibri" pitchFamily="34" charset="-122"/>
@@ -10238,7 +10238,7 @@
             <a:r>
               <a:rPr lang="en-US" sz="2600" b="1" dirty="0">
                 <a:solidFill>
-                  <a:srgbClr val="6C9BFF"/>
+                  <a:srgbClr val="6FA8FF"/>
                 </a:solidFill>
                 <a:latin typeface="Cambria" pitchFamily="34" charset="0"/>
                 <a:ea typeface="Cambria" pitchFamily="34" charset="-122"/>
@@ -10343,7 +10343,7 @@
             <a:r>
               <a:rPr lang="en-US" sz="1900" b="1" dirty="0">
                 <a:solidFill>
-                  <a:srgbClr val="16202C"/>
+                  <a:srgbClr val="141A1F"/>
                 </a:solidFill>
                 <a:latin typeface="Calibri" pitchFamily="34" charset="0"/>
                 <a:ea typeface="Calibri" pitchFamily="34" charset="-122"/>
@@ -10460,7 +10460,7 @@
             <a:r>
               <a:rPr lang="en-US" sz="1400" b="1" dirty="0">
                 <a:solidFill>
-                  <a:srgbClr val="16202C"/>
+                  <a:srgbClr val="141A1F"/>
                 </a:solidFill>
                 <a:latin typeface="Calibri" pitchFamily="34" charset="0"/>
                 <a:ea typeface="Calibri" pitchFamily="34" charset="-122"/>
@@ -10538,7 +10538,7 @@
             <a:r>
               <a:rPr lang="en-US" sz="1400" b="1" dirty="0">
                 <a:solidFill>
-                  <a:srgbClr val="16202C"/>
+                  <a:srgbClr val="141A1F"/>
                 </a:solidFill>
                 <a:latin typeface="Calibri" pitchFamily="34" charset="0"/>
                 <a:ea typeface="Calibri" pitchFamily="34" charset="-122"/>
@@ -10616,7 +10616,7 @@
             <a:r>
               <a:rPr lang="en-US" sz="1400" b="1" dirty="0">
                 <a:solidFill>
-                  <a:srgbClr val="16202C"/>
+                  <a:srgbClr val="141A1F"/>
                 </a:solidFill>
                 <a:latin typeface="Calibri" pitchFamily="34" charset="0"/>
                 <a:ea typeface="Calibri" pitchFamily="34" charset="-122"/>
@@ -10733,7 +10733,7 @@
             <a:r>
               <a:rPr lang="en-US" sz="1500" dirty="0">
                 <a:solidFill>
-                  <a:srgbClr val="16202C"/>
+                  <a:srgbClr val="141A1F"/>
                 </a:solidFill>
                 <a:latin typeface="Calibri" pitchFamily="34" charset="0"/>
                 <a:ea typeface="Calibri" pitchFamily="34" charset="-122"/>
@@ -10819,7 +10819,7 @@
             <a:r>
               <a:rPr lang="en-US" sz="1300" b="1" dirty="0">
                 <a:solidFill>
-                  <a:srgbClr val="16202C"/>
+                  <a:srgbClr val="141A1F"/>
                 </a:solidFill>
                 <a:latin typeface="Calibri" pitchFamily="34" charset="0"/>
                 <a:ea typeface="Calibri" pitchFamily="34" charset="-122"/>
@@ -10890,7 +10890,7 @@
             <a:r>
               <a:rPr lang="en-US" sz="1100" b="1" spc="200" kern="0" dirty="0">
                 <a:solidFill>
-                  <a:srgbClr val="3B6FE0"/>
+                  <a:srgbClr val="0067E5"/>
                 </a:solidFill>
                 <a:latin typeface="Calibri" pitchFamily="34" charset="0"/>
                 <a:ea typeface="Calibri" pitchFamily="34" charset="-122"/>
@@ -10929,7 +10929,7 @@
             <a:r>
               <a:rPr lang="en-US" sz="3400" b="1" dirty="0">
                 <a:solidFill>
-                  <a:srgbClr val="16202C"/>
+                  <a:srgbClr val="141A1F"/>
                 </a:solidFill>
                 <a:latin typeface="Cambria" pitchFamily="34" charset="0"/>
                 <a:ea typeface="Cambria" pitchFamily="34" charset="-122"/>
@@ -10995,7 +10995,7 @@
             <a:r>
               <a:rPr lang="en-US" sz="1700" b="1" dirty="0">
                 <a:solidFill>
-                  <a:srgbClr val="16202C"/>
+                  <a:srgbClr val="141A1F"/>
                 </a:solidFill>
                 <a:latin typeface="Calibri" pitchFamily="34" charset="0"/>
                 <a:ea typeface="Calibri" pitchFamily="34" charset="-122"/>
@@ -11324,7 +11324,7 @@
             <a:avLst/>
           </a:prstGeom>
           <a:solidFill>
-            <a:srgbClr val="3B6FE0"/>
+            <a:srgbClr val="0067E5"/>
           </a:solidFill>
           <a:ln/>
         </p:spPr>
@@ -11383,7 +11383,7 @@
             <a:avLst/>
           </a:prstGeom>
           <a:solidFill>
-            <a:srgbClr val="3B6FE0"/>
+            <a:srgbClr val="0067E5"/>
           </a:solidFill>
           <a:ln/>
         </p:spPr>
@@ -11442,7 +11442,7 @@
             <a:avLst/>
           </a:prstGeom>
           <a:solidFill>
-            <a:srgbClr val="3B6FE0"/>
+            <a:srgbClr val="0067E5"/>
           </a:solidFill>
           <a:ln/>
         </p:spPr>
@@ -11501,7 +11501,7 @@
             <a:avLst/>
           </a:prstGeom>
           <a:solidFill>
-            <a:srgbClr val="3B6FE0"/>
+            <a:srgbClr val="0067E5"/>
           </a:solidFill>
           <a:ln/>
         </p:spPr>
@@ -11572,7 +11572,7 @@
             <a:r>
               <a:rPr lang="en-US" sz="3000" b="1" dirty="0">
                 <a:solidFill>
-                  <a:srgbClr val="3B6FE0"/>
+                  <a:srgbClr val="0067E5"/>
                 </a:solidFill>
                 <a:latin typeface="Cambria" pitchFamily="34" charset="0"/>
                 <a:ea typeface="Cambria" pitchFamily="34" charset="-122"/>
@@ -11650,7 +11650,7 @@
             <a:r>
               <a:rPr lang="en-US" sz="3000" b="1" dirty="0">
                 <a:solidFill>
-                  <a:srgbClr val="3B6FE0"/>
+                  <a:srgbClr val="0067E5"/>
                 </a:solidFill>
                 <a:latin typeface="Cambria" pitchFamily="34" charset="0"/>
                 <a:ea typeface="Cambria" pitchFamily="34" charset="-122"/>
@@ -11728,7 +11728,7 @@
             <a:r>
               <a:rPr lang="en-US" sz="3000" b="1" dirty="0">
                 <a:solidFill>
-                  <a:srgbClr val="3B6FE0"/>
+                  <a:srgbClr val="0067E5"/>
                 </a:solidFill>
                 <a:latin typeface="Cambria" pitchFamily="34" charset="0"/>
                 <a:ea typeface="Cambria" pitchFamily="34" charset="-122"/>
@@ -11838,7 +11838,7 @@
             <a:r>
               <a:rPr lang="en-US" sz="1100" b="1" spc="200" kern="0" dirty="0">
                 <a:solidFill>
-                  <a:srgbClr val="3B6FE0"/>
+                  <a:srgbClr val="0067E5"/>
                 </a:solidFill>
                 <a:latin typeface="Calibri" pitchFamily="34" charset="0"/>
                 <a:ea typeface="Calibri" pitchFamily="34" charset="-122"/>
@@ -11877,7 +11877,7 @@
             <a:r>
               <a:rPr lang="en-US" sz="3400" b="1" dirty="0">
                 <a:solidFill>
-                  <a:srgbClr val="16202C"/>
+                  <a:srgbClr val="141A1F"/>
                 </a:solidFill>
                 <a:latin typeface="Cambria" pitchFamily="34" charset="0"/>
                 <a:ea typeface="Cambria" pitchFamily="34" charset="-122"/>
@@ -11943,7 +11943,7 @@
             <a:r>
               <a:rPr lang="en-US" sz="1200" b="1" dirty="0">
                 <a:solidFill>
-                  <a:srgbClr val="3B6FE0"/>
+                  <a:srgbClr val="0067E5"/>
                 </a:solidFill>
                 <a:latin typeface="Calibri" pitchFamily="34" charset="0"/>
                 <a:ea typeface="Calibri" pitchFamily="34" charset="-122"/>
@@ -11982,7 +11982,7 @@
             <a:r>
               <a:rPr lang="en-US" sz="1600" b="1" dirty="0">
                 <a:solidFill>
-                  <a:srgbClr val="16202C"/>
+                  <a:srgbClr val="141A1F"/>
                 </a:solidFill>
                 <a:latin typeface="Calibri" pitchFamily="34" charset="0"/>
                 <a:ea typeface="Calibri" pitchFamily="34" charset="-122"/>
@@ -12087,7 +12087,7 @@
             <a:r>
               <a:rPr lang="en-US" sz="1200" b="1" dirty="0">
                 <a:solidFill>
-                  <a:srgbClr val="3B6FE0"/>
+                  <a:srgbClr val="0067E5"/>
                 </a:solidFill>
                 <a:latin typeface="Calibri" pitchFamily="34" charset="0"/>
                 <a:ea typeface="Calibri" pitchFamily="34" charset="-122"/>
@@ -12126,7 +12126,7 @@
             <a:r>
               <a:rPr lang="en-US" sz="1600" b="1" dirty="0">
                 <a:solidFill>
-                  <a:srgbClr val="16202C"/>
+                  <a:srgbClr val="141A1F"/>
                 </a:solidFill>
                 <a:latin typeface="Calibri" pitchFamily="34" charset="0"/>
                 <a:ea typeface="Calibri" pitchFamily="34" charset="-122"/>
@@ -12231,7 +12231,7 @@
             <a:r>
               <a:rPr lang="en-US" sz="1200" b="1" dirty="0">
                 <a:solidFill>
-                  <a:srgbClr val="3B6FE0"/>
+                  <a:srgbClr val="0067E5"/>
                 </a:solidFill>
                 <a:latin typeface="Calibri" pitchFamily="34" charset="0"/>
                 <a:ea typeface="Calibri" pitchFamily="34" charset="-122"/>
@@ -12270,7 +12270,7 @@
             <a:r>
               <a:rPr lang="en-US" sz="1600" b="1" dirty="0">
                 <a:solidFill>
-                  <a:srgbClr val="16202C"/>
+                  <a:srgbClr val="141A1F"/>
                 </a:solidFill>
                 <a:latin typeface="Calibri" pitchFamily="34" charset="0"/>
                 <a:ea typeface="Calibri" pitchFamily="34" charset="-122"/>
@@ -12375,7 +12375,7 @@
             <a:r>
               <a:rPr lang="en-US" sz="1200" b="1" dirty="0">
                 <a:solidFill>
-                  <a:srgbClr val="3B6FE0"/>
+                  <a:srgbClr val="0067E5"/>
                 </a:solidFill>
                 <a:latin typeface="Calibri" pitchFamily="34" charset="0"/>
                 <a:ea typeface="Calibri" pitchFamily="34" charset="-122"/>
@@ -12414,7 +12414,7 @@
             <a:r>
               <a:rPr lang="en-US" sz="1600" b="1" dirty="0">
                 <a:solidFill>
-                  <a:srgbClr val="16202C"/>
+                  <a:srgbClr val="141A1F"/>
                 </a:solidFill>
                 <a:latin typeface="Calibri" pitchFamily="34" charset="0"/>
                 <a:ea typeface="Calibri" pitchFamily="34" charset="-122"/>
@@ -12519,7 +12519,7 @@
             <a:r>
               <a:rPr lang="en-US" sz="1200" b="1" dirty="0">
                 <a:solidFill>
-                  <a:srgbClr val="3B6FE0"/>
+                  <a:srgbClr val="0067E5"/>
                 </a:solidFill>
                 <a:latin typeface="Calibri" pitchFamily="34" charset="0"/>
                 <a:ea typeface="Calibri" pitchFamily="34" charset="-122"/>
@@ -12558,7 +12558,7 @@
             <a:r>
               <a:rPr lang="en-US" sz="1600" b="1" dirty="0">
                 <a:solidFill>
-                  <a:srgbClr val="16202C"/>
+                  <a:srgbClr val="141A1F"/>
                 </a:solidFill>
                 <a:latin typeface="Calibri" pitchFamily="34" charset="0"/>
                 <a:ea typeface="Calibri" pitchFamily="34" charset="-122"/>
@@ -12663,7 +12663,7 @@
             <a:r>
               <a:rPr lang="en-US" sz="1200" b="1" dirty="0">
                 <a:solidFill>
-                  <a:srgbClr val="3B6FE0"/>
+                  <a:srgbClr val="0067E5"/>
                 </a:solidFill>
                 <a:latin typeface="Calibri" pitchFamily="34" charset="0"/>
                 <a:ea typeface="Calibri" pitchFamily="34" charset="-122"/>
@@ -12702,7 +12702,7 @@
             <a:r>
               <a:rPr lang="en-US" sz="1600" b="1" dirty="0">
                 <a:solidFill>
-                  <a:srgbClr val="16202C"/>
+                  <a:srgbClr val="141A1F"/>
                 </a:solidFill>
                 <a:latin typeface="Calibri" pitchFamily="34" charset="0"/>
                 <a:ea typeface="Calibri" pitchFamily="34" charset="-122"/>
@@ -12807,7 +12807,7 @@
             <a:r>
               <a:rPr lang="en-US" sz="1200" b="1" dirty="0">
                 <a:solidFill>
-                  <a:srgbClr val="3B6FE0"/>
+                  <a:srgbClr val="0067E5"/>
                 </a:solidFill>
                 <a:latin typeface="Calibri" pitchFamily="34" charset="0"/>
                 <a:ea typeface="Calibri" pitchFamily="34" charset="-122"/>
@@ -12846,7 +12846,7 @@
             <a:r>
               <a:rPr lang="en-US" sz="1600" b="1" dirty="0">
                 <a:solidFill>
-                  <a:srgbClr val="16202C"/>
+                  <a:srgbClr val="141A1F"/>
                 </a:solidFill>
                 <a:latin typeface="Calibri" pitchFamily="34" charset="0"/>
                 <a:ea typeface="Calibri" pitchFamily="34" charset="-122"/>
@@ -12951,7 +12951,7 @@
             <a:r>
               <a:rPr lang="en-US" sz="1200" b="1" dirty="0">
                 <a:solidFill>
-                  <a:srgbClr val="3B6FE0"/>
+                  <a:srgbClr val="0067E5"/>
                 </a:solidFill>
                 <a:latin typeface="Calibri" pitchFamily="34" charset="0"/>
                 <a:ea typeface="Calibri" pitchFamily="34" charset="-122"/>
@@ -12990,7 +12990,7 @@
             <a:r>
               <a:rPr lang="en-US" sz="1600" b="1" dirty="0">
                 <a:solidFill>
-                  <a:srgbClr val="16202C"/>
+                  <a:srgbClr val="141A1F"/>
                 </a:solidFill>
                 <a:latin typeface="Calibri" pitchFamily="34" charset="0"/>
                 <a:ea typeface="Calibri" pitchFamily="34" charset="-122"/>
@@ -13166,7 +13166,7 @@
             <a:r>
               <a:rPr lang="en-US" sz="1100" b="1" spc="200" kern="0" dirty="0">
                 <a:solidFill>
-                  <a:srgbClr val="3B6FE0"/>
+                  <a:srgbClr val="0067E5"/>
                 </a:solidFill>
                 <a:latin typeface="Calibri" pitchFamily="34" charset="0"/>
                 <a:ea typeface="Calibri" pitchFamily="34" charset="-122"/>
@@ -13205,7 +13205,7 @@
             <a:r>
               <a:rPr lang="en-US" sz="3400" b="1" dirty="0">
                 <a:solidFill>
-                  <a:srgbClr val="16202C"/>
+                  <a:srgbClr val="141A1F"/>
                 </a:solidFill>
                 <a:latin typeface="Cambria" pitchFamily="34" charset="0"/>
                 <a:ea typeface="Cambria" pitchFamily="34" charset="-122"/>
@@ -13291,7 +13291,7 @@
             <a:r>
               <a:rPr lang="en-US" sz="1500" b="1" dirty="0">
                 <a:solidFill>
-                  <a:srgbClr val="16202C"/>
+                  <a:srgbClr val="141A1F"/>
                 </a:solidFill>
                 <a:latin typeface="Calibri" pitchFamily="34" charset="0"/>
                 <a:ea typeface="Calibri" pitchFamily="34" charset="-122"/>
@@ -13455,7 +13455,7 @@
             <a:r>
               <a:rPr lang="en-US" sz="1500" b="1" dirty="0">
                 <a:solidFill>
-                  <a:srgbClr val="16202C"/>
+                  <a:srgbClr val="141A1F"/>
                 </a:solidFill>
                 <a:latin typeface="Calibri" pitchFamily="34" charset="0"/>
                 <a:ea typeface="Calibri" pitchFamily="34" charset="-122"/>
@@ -13619,7 +13619,7 @@
             <a:r>
               <a:rPr lang="en-US" sz="1500" b="1" dirty="0">
                 <a:solidFill>
-                  <a:srgbClr val="16202C"/>
+                  <a:srgbClr val="141A1F"/>
                 </a:solidFill>
                 <a:latin typeface="Calibri" pitchFamily="34" charset="0"/>
                 <a:ea typeface="Calibri" pitchFamily="34" charset="-122"/>
@@ -13736,7 +13736,7 @@
             <a:r>
               <a:rPr lang="en-US" sz="1600" b="1" dirty="0">
                 <a:solidFill>
-                  <a:srgbClr val="16202C"/>
+                  <a:srgbClr val="141A1F"/>
                 </a:solidFill>
                 <a:latin typeface="Calibri" pitchFamily="34" charset="0"/>
                 <a:ea typeface="Calibri" pitchFamily="34" charset="-122"/>

--- a/docs/TripRescue-pitch.pptx
+++ b/docs/TripRescue-pitch.pptx
@@ -3139,7 +3139,7 @@
                 <a:ea typeface="Cambria" pitchFamily="34" charset="-122"/>
                 <a:cs typeface="Cambria" pitchFamily="34" charset="-120"/>
               </a:rPr>
-              <a:t>38</a:t>
+              <a:t>93</a:t>
             </a:r>
             <a:endParaRPr lang="en-US" sz="6000" dirty="0"/>
           </a:p>
@@ -14194,7 +14194,7 @@
                 <a:ea typeface="Calibri" pitchFamily="34" charset="-122"/>
                 <a:cs typeface="Calibri" pitchFamily="34" charset="-120"/>
               </a:rPr>
-              <a:t>38 automated tests · deterministic policy · full decision trace in the UI</a:t>
+              <a:t>93 automated tests · deterministic policy · full decision trace in the UI</a:t>
             </a:r>
             <a:endParaRPr lang="en-US" sz="1300" dirty="0"/>
           </a:p>
